--- a/public/lessons/year-6-maths/summer/week-29/solve-multi-step-number-problems/teaching-powerpoint-v1.pptx
+++ b/public/lessons/year-6-maths/summer/week-29/solve-multi-step-number-problems/teaching-powerpoint-v1.pptx
@@ -2,24 +2,24 @@
 <file path=ppt/presentation.xml><?xml version="1.0" encoding="utf-8"?>
 <p:presentation xmlns:p="http://schemas.openxmlformats.org/presentationml/2006/main">
   <p:sldMasterIdLst>
-    <p:sldMasterId xmlns:r="http://schemas.openxmlformats.org/officeDocument/2006/relationships" id="2147483648" r:id="R4fda59f7c6a74f33"/>
+    <p:sldMasterId xmlns:r="http://schemas.openxmlformats.org/officeDocument/2006/relationships" id="2147483648" r:id="Raf9687857c8b477d"/>
   </p:sldMasterIdLst>
   <p:notesMasterIdLst>
-    <p:notesMasterId xmlns:r="http://schemas.openxmlformats.org/officeDocument/2006/relationships" r:id="R58ba7aacc9ed464b"/>
+    <p:notesMasterId xmlns:r="http://schemas.openxmlformats.org/officeDocument/2006/relationships" r:id="Rd50b549212604338"/>
   </p:notesMasterIdLst>
   <p:sldIdLst>
-    <p:sldId xmlns:r="http://schemas.openxmlformats.org/officeDocument/2006/relationships" id="256" r:id="R1c4a0cc5367647f2"/>
-    <p:sldId xmlns:r="http://schemas.openxmlformats.org/officeDocument/2006/relationships" id="257" r:id="R53ca0c3f36754408"/>
-    <p:sldId xmlns:r="http://schemas.openxmlformats.org/officeDocument/2006/relationships" id="258" r:id="Rca67d1979be24744"/>
-    <p:sldId xmlns:r="http://schemas.openxmlformats.org/officeDocument/2006/relationships" id="259" r:id="Re466a73d10cd448f"/>
-    <p:sldId xmlns:r="http://schemas.openxmlformats.org/officeDocument/2006/relationships" id="260" r:id="Rc34a0fa26cb04a7f"/>
-    <p:sldId xmlns:r="http://schemas.openxmlformats.org/officeDocument/2006/relationships" id="261" r:id="R043f67b476f04221"/>
-    <p:sldId xmlns:r="http://schemas.openxmlformats.org/officeDocument/2006/relationships" id="262" r:id="R5d0bfeea8e1f492b"/>
-    <p:sldId xmlns:r="http://schemas.openxmlformats.org/officeDocument/2006/relationships" id="263" r:id="Rb1d1f206fe5040f2"/>
-    <p:sldId xmlns:r="http://schemas.openxmlformats.org/officeDocument/2006/relationships" id="264" r:id="R4e714e0a59354613"/>
-    <p:sldId xmlns:r="http://schemas.openxmlformats.org/officeDocument/2006/relationships" id="265" r:id="Re1b5c0cc35d64470"/>
-    <p:sldId xmlns:r="http://schemas.openxmlformats.org/officeDocument/2006/relationships" id="266" r:id="Rfac459d74db14150"/>
-    <p:sldId xmlns:r="http://schemas.openxmlformats.org/officeDocument/2006/relationships" id="267" r:id="R006a862f68394fcf"/>
+    <p:sldId xmlns:r="http://schemas.openxmlformats.org/officeDocument/2006/relationships" id="256" r:id="Rdfdf67faa3b740c8"/>
+    <p:sldId xmlns:r="http://schemas.openxmlformats.org/officeDocument/2006/relationships" id="257" r:id="Red7e995aff4b462f"/>
+    <p:sldId xmlns:r="http://schemas.openxmlformats.org/officeDocument/2006/relationships" id="258" r:id="Re5ff3446db35427d"/>
+    <p:sldId xmlns:r="http://schemas.openxmlformats.org/officeDocument/2006/relationships" id="259" r:id="Ra6f84c68b1cf492a"/>
+    <p:sldId xmlns:r="http://schemas.openxmlformats.org/officeDocument/2006/relationships" id="260" r:id="Rbf0138788f814241"/>
+    <p:sldId xmlns:r="http://schemas.openxmlformats.org/officeDocument/2006/relationships" id="261" r:id="R426694b4c3894857"/>
+    <p:sldId xmlns:r="http://schemas.openxmlformats.org/officeDocument/2006/relationships" id="262" r:id="R296b3666f2794312"/>
+    <p:sldId xmlns:r="http://schemas.openxmlformats.org/officeDocument/2006/relationships" id="263" r:id="Re1b68f6e197e4486"/>
+    <p:sldId xmlns:r="http://schemas.openxmlformats.org/officeDocument/2006/relationships" id="264" r:id="R0fa8eeee293d4e2a"/>
+    <p:sldId xmlns:r="http://schemas.openxmlformats.org/officeDocument/2006/relationships" id="265" r:id="R940bc84541084ec5"/>
+    <p:sldId xmlns:r="http://schemas.openxmlformats.org/officeDocument/2006/relationships" id="266" r:id="R2b1d803ea614437a"/>
+    <p:sldId xmlns:r="http://schemas.openxmlformats.org/officeDocument/2006/relationships" id="267" r:id="R152fc342041f40a7"/>
   </p:sldIdLst>
   <p:sldSz cx="12192000" cy="6858000"/>
   <p:notesSz cx="6858000" cy="9144000"/>
@@ -873,7 +873,7 @@
           <a:lstStyle xmlns:a="http://schemas.openxmlformats.org/drawingml/2006/main"/>
           <a:p xmlns:a="http://schemas.openxmlformats.org/drawingml/2006/main">
             <a:r>
-              <a:t>I do. Reveal the question, setup and each calculation stage one click at a time. Pupils watch before copying. Model answer: 49.</a:t>
+              <a:t>I do. Reveal the question, then reveal each mathematical change one click at a time. Point to the numbers and operation that changed before moving to the next line. Final answer: 49.</a:t>
             </a:r>
           </a:p>
         </p:txBody>
@@ -1291,7 +1291,7 @@
   </p:cSld>
   <p:clrMap bg1="lt1" tx1="dk1" bg2="lt2" tx2="dk2" accent1="accent1" accent2="accent2" accent3="accent3" accent4="accent4" accent5="accent5" accent6="accent6" hlink="hlink" folHlink="folHlink"/>
   <p:sldLayoutIdLst>
-    <p:sldLayoutId xmlns:r="http://schemas.openxmlformats.org/officeDocument/2006/relationships" id="2147483649" r:id="R315b72f46b8545a9"/>
+    <p:sldLayoutId xmlns:r="http://schemas.openxmlformats.org/officeDocument/2006/relationships" id="2147483649" r:id="Rc84d5cfc11654baa"/>
   </p:sldLayoutIdLst>
   <p:txStyles>
     <p:titleStyle>
@@ -1842,7 +1842,7 @@
           <p:cNvPr id="12" name="">
             <a:extLst xmlns:a="http://schemas.openxmlformats.org/drawingml/2006/main">
               <a:ext uri="{FF2B5EF4-FFF2-40B4-BE49-F238E27FC236}">
-                <a16:creationId xmlns:a16="http://schemas.microsoft.com/office/drawing/2014/main" id="{C99EA6C6-E684-4BB5-975B-DCA8B53E76E5}"/>
+                <a16:creationId xmlns:a16="http://schemas.microsoft.com/office/drawing/2014/main" id="{65B5F0A4-AED4-40C3-8481-94DD875E0F3E}"/>
               </a:ext>
             </a:extLst>
           </p:cNvPr>
@@ -1874,7 +1874,7 @@
           <p:cNvPr id="2" name="">
             <a:extLst xmlns:a="http://schemas.openxmlformats.org/drawingml/2006/main">
               <a:ext uri="{FF2B5EF4-FFF2-40B4-BE49-F238E27FC236}">
-                <a16:creationId xmlns:a16="http://schemas.microsoft.com/office/drawing/2014/main" id="{763FDDD5-4211-4531-B151-3E3927186C1A}"/>
+                <a16:creationId xmlns:a16="http://schemas.microsoft.com/office/drawing/2014/main" id="{12F163C5-9191-48CC-A975-6DFB4C6954D3}"/>
               </a:ext>
             </a:extLst>
           </p:cNvPr>
@@ -1931,7 +1931,7 @@
           <p:cNvPr id="3" name="">
             <a:extLst xmlns:a="http://schemas.openxmlformats.org/drawingml/2006/main">
               <a:ext uri="{FF2B5EF4-FFF2-40B4-BE49-F238E27FC236}">
-                <a16:creationId xmlns:a16="http://schemas.microsoft.com/office/drawing/2014/main" id="{95397983-64DB-43ED-9DD3-CBB6C8F4C02A}"/>
+                <a16:creationId xmlns:a16="http://schemas.microsoft.com/office/drawing/2014/main" id="{5A4FEF15-99C8-434C-81E7-950CAF5C205C}"/>
               </a:ext>
             </a:extLst>
           </p:cNvPr>
@@ -1965,7 +1965,7 @@
           <p:cNvPr id="4" name="">
             <a:extLst xmlns:a="http://schemas.openxmlformats.org/drawingml/2006/main">
               <a:ext uri="{FF2B5EF4-FFF2-40B4-BE49-F238E27FC236}">
-                <a16:creationId xmlns:a16="http://schemas.microsoft.com/office/drawing/2014/main" id="{428F3B2C-8B88-4679-BB31-2BCF4AF9940A}"/>
+                <a16:creationId xmlns:a16="http://schemas.microsoft.com/office/drawing/2014/main" id="{0B79781B-65CE-49B1-993C-49F322AADFF0}"/>
               </a:ext>
             </a:extLst>
           </p:cNvPr>
@@ -2022,7 +2022,7 @@
           <p:cNvPr id="5" name="">
             <a:extLst xmlns:a="http://schemas.openxmlformats.org/drawingml/2006/main">
               <a:ext uri="{FF2B5EF4-FFF2-40B4-BE49-F238E27FC236}">
-                <a16:creationId xmlns:a16="http://schemas.microsoft.com/office/drawing/2014/main" id="{FA972E35-C939-4347-A3F7-2623CD1DF441}"/>
+                <a16:creationId xmlns:a16="http://schemas.microsoft.com/office/drawing/2014/main" id="{EE6E3208-0E97-4614-881C-463C7FB5CBFF}"/>
               </a:ext>
             </a:extLst>
           </p:cNvPr>
@@ -2079,7 +2079,7 @@
           <p:cNvPr id="6" name="">
             <a:extLst xmlns:a="http://schemas.openxmlformats.org/drawingml/2006/main">
               <a:ext uri="{FF2B5EF4-FFF2-40B4-BE49-F238E27FC236}">
-                <a16:creationId xmlns:a16="http://schemas.microsoft.com/office/drawing/2014/main" id="{615B5FB5-309B-4FE8-B6B6-D570028FDA21}"/>
+                <a16:creationId xmlns:a16="http://schemas.microsoft.com/office/drawing/2014/main" id="{D33BCDB0-E96F-4C3A-8641-4737481A655E}"/>
               </a:ext>
             </a:extLst>
           </p:cNvPr>
@@ -2113,7 +2113,7 @@
           <p:cNvPr id="7" name="">
             <a:extLst xmlns:a="http://schemas.openxmlformats.org/drawingml/2006/main">
               <a:ext uri="{FF2B5EF4-FFF2-40B4-BE49-F238E27FC236}">
-                <a16:creationId xmlns:a16="http://schemas.microsoft.com/office/drawing/2014/main" id="{D4303508-E33D-40D9-8D28-67B07375A2E5}"/>
+                <a16:creationId xmlns:a16="http://schemas.microsoft.com/office/drawing/2014/main" id="{5803D096-10CA-4674-A0A7-C652A103B356}"/>
               </a:ext>
             </a:extLst>
           </p:cNvPr>
@@ -2170,7 +2170,7 @@
           <p:cNvPr id="8" name="">
             <a:extLst xmlns:a="http://schemas.openxmlformats.org/drawingml/2006/main">
               <a:ext uri="{FF2B5EF4-FFF2-40B4-BE49-F238E27FC236}">
-                <a16:creationId xmlns:a16="http://schemas.microsoft.com/office/drawing/2014/main" id="{8233918C-638E-4056-98F9-F14C9A4523E8}"/>
+                <a16:creationId xmlns:a16="http://schemas.microsoft.com/office/drawing/2014/main" id="{F7187AA8-78D9-4414-82F0-DD08AF587CDE}"/>
               </a:ext>
             </a:extLst>
           </p:cNvPr>
@@ -2227,7 +2227,7 @@
           <p:cNvPr id="9" name="">
             <a:extLst xmlns:a="http://schemas.openxmlformats.org/drawingml/2006/main">
               <a:ext uri="{FF2B5EF4-FFF2-40B4-BE49-F238E27FC236}">
-                <a16:creationId xmlns:a16="http://schemas.microsoft.com/office/drawing/2014/main" id="{C051A3EB-F9FB-4B35-A134-F03A7989AAB5}"/>
+                <a16:creationId xmlns:a16="http://schemas.microsoft.com/office/drawing/2014/main" id="{320A976F-D37C-42A0-B688-AFEC2A4C35F3}"/>
               </a:ext>
             </a:extLst>
           </p:cNvPr>
@@ -2284,7 +2284,7 @@
           <p:cNvPr id="10" name="">
             <a:extLst xmlns:a="http://schemas.openxmlformats.org/drawingml/2006/main">
               <a:ext uri="{FF2B5EF4-FFF2-40B4-BE49-F238E27FC236}">
-                <a16:creationId xmlns:a16="http://schemas.microsoft.com/office/drawing/2014/main" id="{8DAC9102-00CA-45AF-ABC4-F7789977C0C4}"/>
+                <a16:creationId xmlns:a16="http://schemas.microsoft.com/office/drawing/2014/main" id="{C263BAEE-CF52-4FF0-A886-1FF2A540D700}"/>
               </a:ext>
             </a:extLst>
           </p:cNvPr>
@@ -2341,7 +2341,7 @@
           <p:cNvPr id="11" name="">
             <a:extLst xmlns:a="http://schemas.openxmlformats.org/drawingml/2006/main">
               <a:ext uri="{FF2B5EF4-FFF2-40B4-BE49-F238E27FC236}">
-                <a16:creationId xmlns:a16="http://schemas.microsoft.com/office/drawing/2014/main" id="{DA8D558E-1181-4B73-8959-C28FC84F1557}"/>
+                <a16:creationId xmlns:a16="http://schemas.microsoft.com/office/drawing/2014/main" id="{F13605FA-417C-4CBE-8C2A-B50FC1D991AF}"/>
               </a:ext>
             </a:extLst>
           </p:cNvPr>
@@ -2396,7 +2396,7 @@
     </p:spTree>
     <p:extLst>
       <p:ext uri="{BB962C8B-B14F-4D97-AF65-F5344CB8AC3E}">
-        <p14:creationId xmlns:p14="http://schemas.microsoft.com/office/powerpoint/2010/main" val="382894084"/>
+        <p14:creationId xmlns:p14="http://schemas.microsoft.com/office/powerpoint/2010/main" val="752551020"/>
       </p:ext>
     </p:extLst>
   </p:cSld>
@@ -2427,7 +2427,7 @@
           <p:cNvPr id="14" name="">
             <a:extLst xmlns:a="http://schemas.openxmlformats.org/drawingml/2006/main">
               <a:ext uri="{FF2B5EF4-FFF2-40B4-BE49-F238E27FC236}">
-                <a16:creationId xmlns:a16="http://schemas.microsoft.com/office/drawing/2014/main" id="{7E166182-6EFA-4501-9957-3499C3DDB7D1}"/>
+                <a16:creationId xmlns:a16="http://schemas.microsoft.com/office/drawing/2014/main" id="{D507097D-D4DF-4C4C-87A4-2EB78B3B68EA}"/>
               </a:ext>
             </a:extLst>
           </p:cNvPr>
@@ -2459,7 +2459,7 @@
           <p:cNvPr id="2" name="">
             <a:extLst xmlns:a="http://schemas.openxmlformats.org/drawingml/2006/main">
               <a:ext uri="{FF2B5EF4-FFF2-40B4-BE49-F238E27FC236}">
-                <a16:creationId xmlns:a16="http://schemas.microsoft.com/office/drawing/2014/main" id="{AE9B0395-0ECE-4E99-BA2F-7409A30FDD34}"/>
+                <a16:creationId xmlns:a16="http://schemas.microsoft.com/office/drawing/2014/main" id="{CE55562D-7689-4932-9F45-929BF7DF3111}"/>
               </a:ext>
             </a:extLst>
           </p:cNvPr>
@@ -2516,7 +2516,7 @@
           <p:cNvPr id="3" name="">
             <a:extLst xmlns:a="http://schemas.openxmlformats.org/drawingml/2006/main">
               <a:ext uri="{FF2B5EF4-FFF2-40B4-BE49-F238E27FC236}">
-                <a16:creationId xmlns:a16="http://schemas.microsoft.com/office/drawing/2014/main" id="{EBA7284D-A2C5-4B9C-9B46-E889C4BBFA9B}"/>
+                <a16:creationId xmlns:a16="http://schemas.microsoft.com/office/drawing/2014/main" id="{5D15F9CC-DE22-4863-962A-AA4E52E3B5A0}"/>
               </a:ext>
             </a:extLst>
           </p:cNvPr>
@@ -2548,7 +2548,7 @@
           <p:cNvPr id="4" name="">
             <a:extLst xmlns:a="http://schemas.openxmlformats.org/drawingml/2006/main">
               <a:ext uri="{FF2B5EF4-FFF2-40B4-BE49-F238E27FC236}">
-                <a16:creationId xmlns:a16="http://schemas.microsoft.com/office/drawing/2014/main" id="{19B4564F-72EF-4E2F-BA61-D39E7DA3206E}"/>
+                <a16:creationId xmlns:a16="http://schemas.microsoft.com/office/drawing/2014/main" id="{8747CDBE-3F06-49BD-9FC1-856144802485}"/>
               </a:ext>
             </a:extLst>
           </p:cNvPr>
@@ -2605,7 +2605,7 @@
           <p:cNvPr id="5" name="">
             <a:extLst xmlns:a="http://schemas.openxmlformats.org/drawingml/2006/main">
               <a:ext uri="{FF2B5EF4-FFF2-40B4-BE49-F238E27FC236}">
-                <a16:creationId xmlns:a16="http://schemas.microsoft.com/office/drawing/2014/main" id="{ECE5A40F-0B4B-4F6D-A979-F1573538E5C9}"/>
+                <a16:creationId xmlns:a16="http://schemas.microsoft.com/office/drawing/2014/main" id="{92D6D3F8-268F-4B6F-ACE0-30E46F0D6A21}"/>
               </a:ext>
             </a:extLst>
           </p:cNvPr>
@@ -2662,7 +2662,7 @@
           <p:cNvPr id="6" name="">
             <a:extLst xmlns:a="http://schemas.openxmlformats.org/drawingml/2006/main">
               <a:ext uri="{FF2B5EF4-FFF2-40B4-BE49-F238E27FC236}">
-                <a16:creationId xmlns:a16="http://schemas.microsoft.com/office/drawing/2014/main" id="{37BB170A-9DC3-4208-B888-8BB827D220FC}"/>
+                <a16:creationId xmlns:a16="http://schemas.microsoft.com/office/drawing/2014/main" id="{4E734646-5419-4EB6-AE72-87D913AE4618}"/>
               </a:ext>
             </a:extLst>
           </p:cNvPr>
@@ -2719,7 +2719,7 @@
           <p:cNvPr id="7" name="">
             <a:extLst xmlns:a="http://schemas.openxmlformats.org/drawingml/2006/main">
               <a:ext uri="{FF2B5EF4-FFF2-40B4-BE49-F238E27FC236}">
-                <a16:creationId xmlns:a16="http://schemas.microsoft.com/office/drawing/2014/main" id="{A0F91A7F-02F3-4258-816B-43AE10C4F5EF}"/>
+                <a16:creationId xmlns:a16="http://schemas.microsoft.com/office/drawing/2014/main" id="{E80D506D-3069-48BC-9E99-ED77FE56AC33}"/>
               </a:ext>
             </a:extLst>
           </p:cNvPr>
@@ -2751,7 +2751,7 @@
           <p:cNvPr id="8" name="">
             <a:extLst xmlns:a="http://schemas.openxmlformats.org/drawingml/2006/main">
               <a:ext uri="{FF2B5EF4-FFF2-40B4-BE49-F238E27FC236}">
-                <a16:creationId xmlns:a16="http://schemas.microsoft.com/office/drawing/2014/main" id="{7153266A-ACDA-4643-B1E6-267EFD0FBA09}"/>
+                <a16:creationId xmlns:a16="http://schemas.microsoft.com/office/drawing/2014/main" id="{FF037B36-F9DC-40BA-9FA2-6F82F020EBE0}"/>
               </a:ext>
             </a:extLst>
           </p:cNvPr>
@@ -2808,7 +2808,7 @@
           <p:cNvPr id="9" name="">
             <a:extLst xmlns:a="http://schemas.openxmlformats.org/drawingml/2006/main">
               <a:ext uri="{FF2B5EF4-FFF2-40B4-BE49-F238E27FC236}">
-                <a16:creationId xmlns:a16="http://schemas.microsoft.com/office/drawing/2014/main" id="{142A7761-8131-4391-80FF-7C4E34FA74BA}"/>
+                <a16:creationId xmlns:a16="http://schemas.microsoft.com/office/drawing/2014/main" id="{7DC70D73-AB5E-4D7E-90DA-0A75C8945D0C}"/>
               </a:ext>
             </a:extLst>
           </p:cNvPr>
@@ -2865,7 +2865,7 @@
           <p:cNvPr id="10" name="">
             <a:extLst xmlns:a="http://schemas.openxmlformats.org/drawingml/2006/main">
               <a:ext uri="{FF2B5EF4-FFF2-40B4-BE49-F238E27FC236}">
-                <a16:creationId xmlns:a16="http://schemas.microsoft.com/office/drawing/2014/main" id="{839E7065-A4E9-4429-A1BC-0C25D95590E9}"/>
+                <a16:creationId xmlns:a16="http://schemas.microsoft.com/office/drawing/2014/main" id="{9C0877C8-6B3F-4796-B38E-7CDA4DED19B5}"/>
               </a:ext>
             </a:extLst>
           </p:cNvPr>
@@ -2922,7 +2922,7 @@
           <p:cNvPr id="11" name="">
             <a:extLst xmlns:a="http://schemas.openxmlformats.org/drawingml/2006/main">
               <a:ext uri="{FF2B5EF4-FFF2-40B4-BE49-F238E27FC236}">
-                <a16:creationId xmlns:a16="http://schemas.microsoft.com/office/drawing/2014/main" id="{D71F6792-A9B5-498B-8FCC-F1D65AC47184}"/>
+                <a16:creationId xmlns:a16="http://schemas.microsoft.com/office/drawing/2014/main" id="{EA7E0A02-856E-44D4-A93A-D9140D39FD3E}"/>
               </a:ext>
             </a:extLst>
           </p:cNvPr>
@@ -2979,7 +2979,7 @@
           <p:cNvPr id="12" name="">
             <a:extLst xmlns:a="http://schemas.openxmlformats.org/drawingml/2006/main">
               <a:ext uri="{FF2B5EF4-FFF2-40B4-BE49-F238E27FC236}">
-                <a16:creationId xmlns:a16="http://schemas.microsoft.com/office/drawing/2014/main" id="{1BB83190-508F-430E-B21B-AF5E96D40364}"/>
+                <a16:creationId xmlns:a16="http://schemas.microsoft.com/office/drawing/2014/main" id="{97C785BB-06C6-4342-B38A-8DE3C4EB3D78}"/>
               </a:ext>
             </a:extLst>
           </p:cNvPr>
@@ -3036,7 +3036,7 @@
           <p:cNvPr id="13" name="">
             <a:extLst xmlns:a="http://schemas.openxmlformats.org/drawingml/2006/main">
               <a:ext uri="{FF2B5EF4-FFF2-40B4-BE49-F238E27FC236}">
-                <a16:creationId xmlns:a16="http://schemas.microsoft.com/office/drawing/2014/main" id="{F8938487-A758-400C-902B-AEB2B5C31143}"/>
+                <a16:creationId xmlns:a16="http://schemas.microsoft.com/office/drawing/2014/main" id="{DB547DED-4505-4BF0-A10D-3A8DBC3475F3}"/>
               </a:ext>
             </a:extLst>
           </p:cNvPr>
@@ -3091,7 +3091,7 @@
     </p:spTree>
     <p:extLst>
       <p:ext uri="{BB962C8B-B14F-4D97-AF65-F5344CB8AC3E}">
-        <p14:creationId xmlns:p14="http://schemas.microsoft.com/office/powerpoint/2010/main" val="1612174469"/>
+        <p14:creationId xmlns:p14="http://schemas.microsoft.com/office/powerpoint/2010/main" val="1345335433"/>
       </p:ext>
     </p:extLst>
   </p:cSld>
@@ -3292,7 +3292,7 @@
           <p:cNvPr id="19" name="">
             <a:extLst xmlns:a="http://schemas.openxmlformats.org/drawingml/2006/main">
               <a:ext uri="{FF2B5EF4-FFF2-40B4-BE49-F238E27FC236}">
-                <a16:creationId xmlns:a16="http://schemas.microsoft.com/office/drawing/2014/main" id="{4B6558CD-4E41-4497-875A-D0BF23B9B8FF}"/>
+                <a16:creationId xmlns:a16="http://schemas.microsoft.com/office/drawing/2014/main" id="{EAE42E4C-32B1-4027-9459-76308F64A406}"/>
               </a:ext>
             </a:extLst>
           </p:cNvPr>
@@ -3324,7 +3324,7 @@
           <p:cNvPr id="2" name="">
             <a:extLst xmlns:a="http://schemas.openxmlformats.org/drawingml/2006/main">
               <a:ext uri="{FF2B5EF4-FFF2-40B4-BE49-F238E27FC236}">
-                <a16:creationId xmlns:a16="http://schemas.microsoft.com/office/drawing/2014/main" id="{9C75C907-063F-4B5A-BCC6-ED87E1D3459A}"/>
+                <a16:creationId xmlns:a16="http://schemas.microsoft.com/office/drawing/2014/main" id="{DE92728B-B135-48C2-BF4C-6C9DC1640FAA}"/>
               </a:ext>
             </a:extLst>
           </p:cNvPr>
@@ -3381,7 +3381,7 @@
           <p:cNvPr id="3" name="">
             <a:extLst xmlns:a="http://schemas.openxmlformats.org/drawingml/2006/main">
               <a:ext uri="{FF2B5EF4-FFF2-40B4-BE49-F238E27FC236}">
-                <a16:creationId xmlns:a16="http://schemas.microsoft.com/office/drawing/2014/main" id="{DEEE6AB0-5890-412F-99B3-8180B3905236}"/>
+                <a16:creationId xmlns:a16="http://schemas.microsoft.com/office/drawing/2014/main" id="{35CDACE0-AD88-4D47-85FC-F59907D737F4}"/>
               </a:ext>
             </a:extLst>
           </p:cNvPr>
@@ -3413,7 +3413,7 @@
           <p:cNvPr id="4" name="">
             <a:extLst xmlns:a="http://schemas.openxmlformats.org/drawingml/2006/main">
               <a:ext uri="{FF2B5EF4-FFF2-40B4-BE49-F238E27FC236}">
-                <a16:creationId xmlns:a16="http://schemas.microsoft.com/office/drawing/2014/main" id="{FD0A515F-B06C-412E-9542-7514BB734BDE}"/>
+                <a16:creationId xmlns:a16="http://schemas.microsoft.com/office/drawing/2014/main" id="{1E6C9D81-E899-4774-A4D8-ED201704260D}"/>
               </a:ext>
             </a:extLst>
           </p:cNvPr>
@@ -3470,7 +3470,7 @@
           <p:cNvPr id="5" name="">
             <a:extLst xmlns:a="http://schemas.openxmlformats.org/drawingml/2006/main">
               <a:ext uri="{FF2B5EF4-FFF2-40B4-BE49-F238E27FC236}">
-                <a16:creationId xmlns:a16="http://schemas.microsoft.com/office/drawing/2014/main" id="{AC5EF030-CF3F-4EEA-A1EE-F0108BCEBEDF}"/>
+                <a16:creationId xmlns:a16="http://schemas.microsoft.com/office/drawing/2014/main" id="{676BD27A-50F9-44FC-BB3F-E06F8F76547F}"/>
               </a:ext>
             </a:extLst>
           </p:cNvPr>
@@ -3527,7 +3527,7 @@
           <p:cNvPr id="6" name="">
             <a:extLst xmlns:a="http://schemas.openxmlformats.org/drawingml/2006/main">
               <a:ext uri="{FF2B5EF4-FFF2-40B4-BE49-F238E27FC236}">
-                <a16:creationId xmlns:a16="http://schemas.microsoft.com/office/drawing/2014/main" id="{E8691994-0C34-49A9-BCEA-EE32CE0210B7}"/>
+                <a16:creationId xmlns:a16="http://schemas.microsoft.com/office/drawing/2014/main" id="{30915B40-EC73-4A1B-9EC8-067F8AC9B51D}"/>
               </a:ext>
             </a:extLst>
           </p:cNvPr>
@@ -3584,7 +3584,7 @@
           <p:cNvPr id="7" name="">
             <a:extLst xmlns:a="http://schemas.openxmlformats.org/drawingml/2006/main">
               <a:ext uri="{FF2B5EF4-FFF2-40B4-BE49-F238E27FC236}">
-                <a16:creationId xmlns:a16="http://schemas.microsoft.com/office/drawing/2014/main" id="{61EE3054-8FDE-400B-AA79-03D7CAEE575E}"/>
+                <a16:creationId xmlns:a16="http://schemas.microsoft.com/office/drawing/2014/main" id="{75C823E0-0CBA-4957-90DE-B1C42EC0ECF2}"/>
               </a:ext>
             </a:extLst>
           </p:cNvPr>
@@ -3616,7 +3616,7 @@
           <p:cNvPr id="8" name="">
             <a:extLst xmlns:a="http://schemas.openxmlformats.org/drawingml/2006/main">
               <a:ext uri="{FF2B5EF4-FFF2-40B4-BE49-F238E27FC236}">
-                <a16:creationId xmlns:a16="http://schemas.microsoft.com/office/drawing/2014/main" id="{8C89313C-055E-4E1F-BD1F-5D5C845358BE}"/>
+                <a16:creationId xmlns:a16="http://schemas.microsoft.com/office/drawing/2014/main" id="{35A58687-CB6E-4F50-87F8-00DE6FAC181A}"/>
               </a:ext>
             </a:extLst>
           </p:cNvPr>
@@ -3673,7 +3673,7 @@
           <p:cNvPr id="9" name="">
             <a:extLst xmlns:a="http://schemas.openxmlformats.org/drawingml/2006/main">
               <a:ext uri="{FF2B5EF4-FFF2-40B4-BE49-F238E27FC236}">
-                <a16:creationId xmlns:a16="http://schemas.microsoft.com/office/drawing/2014/main" id="{AF9CD784-BD67-4A59-AF4B-B2A75C7D7B01}"/>
+                <a16:creationId xmlns:a16="http://schemas.microsoft.com/office/drawing/2014/main" id="{128CEFF5-39E0-4D84-B846-80A550218246}"/>
               </a:ext>
             </a:extLst>
           </p:cNvPr>
@@ -3730,7 +3730,7 @@
           <p:cNvPr id="10" name="">
             <a:extLst xmlns:a="http://schemas.openxmlformats.org/drawingml/2006/main">
               <a:ext uri="{FF2B5EF4-FFF2-40B4-BE49-F238E27FC236}">
-                <a16:creationId xmlns:a16="http://schemas.microsoft.com/office/drawing/2014/main" id="{3D165709-FE0F-4B7D-85E4-BEDC60E0DA8D}"/>
+                <a16:creationId xmlns:a16="http://schemas.microsoft.com/office/drawing/2014/main" id="{033B025E-03DC-4039-82BC-0713AB67F47B}"/>
               </a:ext>
             </a:extLst>
           </p:cNvPr>
@@ -3787,7 +3787,7 @@
           <p:cNvPr id="11" name="">
             <a:extLst xmlns:a="http://schemas.openxmlformats.org/drawingml/2006/main">
               <a:ext uri="{FF2B5EF4-FFF2-40B4-BE49-F238E27FC236}">
-                <a16:creationId xmlns:a16="http://schemas.microsoft.com/office/drawing/2014/main" id="{98E45609-3BCB-4EFF-AE8A-0245EB5F4D83}"/>
+                <a16:creationId xmlns:a16="http://schemas.microsoft.com/office/drawing/2014/main" id="{42175E08-30BB-441E-A836-A280398A6382}"/>
               </a:ext>
             </a:extLst>
           </p:cNvPr>
@@ -3821,7 +3821,7 @@
           <p:cNvPr id="12" name="">
             <a:extLst xmlns:a="http://schemas.openxmlformats.org/drawingml/2006/main">
               <a:ext uri="{FF2B5EF4-FFF2-40B4-BE49-F238E27FC236}">
-                <a16:creationId xmlns:a16="http://schemas.microsoft.com/office/drawing/2014/main" id="{44A783D1-FED6-44CD-BD2E-3A89B7135763}"/>
+                <a16:creationId xmlns:a16="http://schemas.microsoft.com/office/drawing/2014/main" id="{90C108A0-AFB9-429F-9912-842E3C587016}"/>
               </a:ext>
             </a:extLst>
           </p:cNvPr>
@@ -3878,7 +3878,7 @@
           <p:cNvPr id="13" name="">
             <a:extLst xmlns:a="http://schemas.openxmlformats.org/drawingml/2006/main">
               <a:ext uri="{FF2B5EF4-FFF2-40B4-BE49-F238E27FC236}">
-                <a16:creationId xmlns:a16="http://schemas.microsoft.com/office/drawing/2014/main" id="{69AE9FF6-4C95-439C-9797-5ECFD32BDEF3}"/>
+                <a16:creationId xmlns:a16="http://schemas.microsoft.com/office/drawing/2014/main" id="{9402E5CC-0F94-4160-B56D-F15F9D2FAE65}"/>
               </a:ext>
             </a:extLst>
           </p:cNvPr>
@@ -3935,7 +3935,7 @@
           <p:cNvPr id="14" name="">
             <a:extLst xmlns:a="http://schemas.openxmlformats.org/drawingml/2006/main">
               <a:ext uri="{FF2B5EF4-FFF2-40B4-BE49-F238E27FC236}">
-                <a16:creationId xmlns:a16="http://schemas.microsoft.com/office/drawing/2014/main" id="{EEAD799C-A110-4967-A0E6-B66667838FA0}"/>
+                <a16:creationId xmlns:a16="http://schemas.microsoft.com/office/drawing/2014/main" id="{21781B3A-0B0E-4C78-969A-9C59707847CD}"/>
               </a:ext>
             </a:extLst>
           </p:cNvPr>
@@ -3992,7 +3992,7 @@
           <p:cNvPr id="15" name="">
             <a:extLst xmlns:a="http://schemas.openxmlformats.org/drawingml/2006/main">
               <a:ext uri="{FF2B5EF4-FFF2-40B4-BE49-F238E27FC236}">
-                <a16:creationId xmlns:a16="http://schemas.microsoft.com/office/drawing/2014/main" id="{76CE9686-28BA-48EE-9470-F7E6586B9072}"/>
+                <a16:creationId xmlns:a16="http://schemas.microsoft.com/office/drawing/2014/main" id="{DF47B18B-4642-4B3A-B68C-9B2F9CDD803F}"/>
               </a:ext>
             </a:extLst>
           </p:cNvPr>
@@ -4026,7 +4026,7 @@
           <p:cNvPr id="16" name="">
             <a:extLst xmlns:a="http://schemas.openxmlformats.org/drawingml/2006/main">
               <a:ext uri="{FF2B5EF4-FFF2-40B4-BE49-F238E27FC236}">
-                <a16:creationId xmlns:a16="http://schemas.microsoft.com/office/drawing/2014/main" id="{34635EFE-5A64-4B50-A546-D110577F4798}"/>
+                <a16:creationId xmlns:a16="http://schemas.microsoft.com/office/drawing/2014/main" id="{E7B35CD1-086F-4B10-BDF9-27F14337F11A}"/>
               </a:ext>
             </a:extLst>
           </p:cNvPr>
@@ -4083,7 +4083,7 @@
           <p:cNvPr id="17" name="">
             <a:extLst xmlns:a="http://schemas.openxmlformats.org/drawingml/2006/main">
               <a:ext uri="{FF2B5EF4-FFF2-40B4-BE49-F238E27FC236}">
-                <a16:creationId xmlns:a16="http://schemas.microsoft.com/office/drawing/2014/main" id="{E00F4C0A-6E44-4837-82A1-457B50F6B2C7}"/>
+                <a16:creationId xmlns:a16="http://schemas.microsoft.com/office/drawing/2014/main" id="{311B374A-E596-4F1D-A312-7C6347F19465}"/>
               </a:ext>
             </a:extLst>
           </p:cNvPr>
@@ -4140,7 +4140,7 @@
           <p:cNvPr id="18" name="">
             <a:extLst xmlns:a="http://schemas.openxmlformats.org/drawingml/2006/main">
               <a:ext uri="{FF2B5EF4-FFF2-40B4-BE49-F238E27FC236}">
-                <a16:creationId xmlns:a16="http://schemas.microsoft.com/office/drawing/2014/main" id="{C51F0A9E-D69E-4370-AEA4-FCBDE40029CA}"/>
+                <a16:creationId xmlns:a16="http://schemas.microsoft.com/office/drawing/2014/main" id="{27F10C6B-BF8B-4B6C-984B-A43DADD5720A}"/>
               </a:ext>
             </a:extLst>
           </p:cNvPr>
@@ -4195,7 +4195,7 @@
     </p:spTree>
     <p:extLst>
       <p:ext uri="{BB962C8B-B14F-4D97-AF65-F5344CB8AC3E}">
-        <p14:creationId xmlns:p14="http://schemas.microsoft.com/office/powerpoint/2010/main" val="150000829"/>
+        <p14:creationId xmlns:p14="http://schemas.microsoft.com/office/powerpoint/2010/main" val="809663299"/>
       </p:ext>
     </p:extLst>
   </p:cSld>
@@ -4350,7 +4350,7 @@
           <p:cNvPr id="23" name="">
             <a:extLst xmlns:a="http://schemas.openxmlformats.org/drawingml/2006/main">
               <a:ext uri="{FF2B5EF4-FFF2-40B4-BE49-F238E27FC236}">
-                <a16:creationId xmlns:a16="http://schemas.microsoft.com/office/drawing/2014/main" id="{0A244225-52F6-4C2C-BBEA-E148E9367CDD}"/>
+                <a16:creationId xmlns:a16="http://schemas.microsoft.com/office/drawing/2014/main" id="{A8568F1A-DA4F-4C81-B1DE-21B02DA6C947}"/>
               </a:ext>
             </a:extLst>
           </p:cNvPr>
@@ -4382,7 +4382,7 @@
           <p:cNvPr id="2" name="">
             <a:extLst xmlns:a="http://schemas.openxmlformats.org/drawingml/2006/main">
               <a:ext uri="{FF2B5EF4-FFF2-40B4-BE49-F238E27FC236}">
-                <a16:creationId xmlns:a16="http://schemas.microsoft.com/office/drawing/2014/main" id="{97B001E1-009B-44A3-A23D-E1A9AEBCFFC3}"/>
+                <a16:creationId xmlns:a16="http://schemas.microsoft.com/office/drawing/2014/main" id="{4D535323-A665-4F30-81E8-D7823042DE3E}"/>
               </a:ext>
             </a:extLst>
           </p:cNvPr>
@@ -4439,7 +4439,7 @@
           <p:cNvPr id="3" name="">
             <a:extLst xmlns:a="http://schemas.openxmlformats.org/drawingml/2006/main">
               <a:ext uri="{FF2B5EF4-FFF2-40B4-BE49-F238E27FC236}">
-                <a16:creationId xmlns:a16="http://schemas.microsoft.com/office/drawing/2014/main" id="{04B18FC0-F979-4FBA-B175-D490CB9F9FBE}"/>
+                <a16:creationId xmlns:a16="http://schemas.microsoft.com/office/drawing/2014/main" id="{69A5A77F-0B72-4FEE-8CB6-723E3C8AB614}"/>
               </a:ext>
             </a:extLst>
           </p:cNvPr>
@@ -4471,7 +4471,7 @@
           <p:cNvPr id="4" name="">
             <a:extLst xmlns:a="http://schemas.openxmlformats.org/drawingml/2006/main">
               <a:ext uri="{FF2B5EF4-FFF2-40B4-BE49-F238E27FC236}">
-                <a16:creationId xmlns:a16="http://schemas.microsoft.com/office/drawing/2014/main" id="{47F9D6A4-0F10-4A6E-A126-7A7DC1750F37}"/>
+                <a16:creationId xmlns:a16="http://schemas.microsoft.com/office/drawing/2014/main" id="{1F3355B4-AAA4-4020-BC09-8487D169110B}"/>
               </a:ext>
             </a:extLst>
           </p:cNvPr>
@@ -4528,7 +4528,7 @@
           <p:cNvPr id="5" name="">
             <a:extLst xmlns:a="http://schemas.openxmlformats.org/drawingml/2006/main">
               <a:ext uri="{FF2B5EF4-FFF2-40B4-BE49-F238E27FC236}">
-                <a16:creationId xmlns:a16="http://schemas.microsoft.com/office/drawing/2014/main" id="{2F718F9E-E134-4F2D-BA5F-11ACCA933472}"/>
+                <a16:creationId xmlns:a16="http://schemas.microsoft.com/office/drawing/2014/main" id="{647132B5-D8FE-4587-8731-E01D2108A9FF}"/>
               </a:ext>
             </a:extLst>
           </p:cNvPr>
@@ -4585,7 +4585,7 @@
           <p:cNvPr id="6" name="">
             <a:extLst xmlns:a="http://schemas.openxmlformats.org/drawingml/2006/main">
               <a:ext uri="{FF2B5EF4-FFF2-40B4-BE49-F238E27FC236}">
-                <a16:creationId xmlns:a16="http://schemas.microsoft.com/office/drawing/2014/main" id="{24A97FF9-8CA9-459C-AEBC-8A1CC14A2111}"/>
+                <a16:creationId xmlns:a16="http://schemas.microsoft.com/office/drawing/2014/main" id="{48FA0F1F-5539-41C7-8B82-500793E1F66E}"/>
               </a:ext>
             </a:extLst>
           </p:cNvPr>
@@ -4642,7 +4642,7 @@
           <p:cNvPr id="7" name="">
             <a:extLst xmlns:a="http://schemas.openxmlformats.org/drawingml/2006/main">
               <a:ext uri="{FF2B5EF4-FFF2-40B4-BE49-F238E27FC236}">
-                <a16:creationId xmlns:a16="http://schemas.microsoft.com/office/drawing/2014/main" id="{A51D2E71-5C40-46A6-8F55-B07612BECD27}"/>
+                <a16:creationId xmlns:a16="http://schemas.microsoft.com/office/drawing/2014/main" id="{3D494F01-2C96-4A18-8D89-C496886E76EF}"/>
               </a:ext>
             </a:extLst>
           </p:cNvPr>
@@ -4674,7 +4674,7 @@
           <p:cNvPr id="8" name="">
             <a:extLst xmlns:a="http://schemas.openxmlformats.org/drawingml/2006/main">
               <a:ext uri="{FF2B5EF4-FFF2-40B4-BE49-F238E27FC236}">
-                <a16:creationId xmlns:a16="http://schemas.microsoft.com/office/drawing/2014/main" id="{EB15FA87-679A-42B6-80D7-2E8BECC7556C}"/>
+                <a16:creationId xmlns:a16="http://schemas.microsoft.com/office/drawing/2014/main" id="{F6FE6080-1149-4338-B73D-53FD31A77258}"/>
               </a:ext>
             </a:extLst>
           </p:cNvPr>
@@ -4731,7 +4731,7 @@
           <p:cNvPr id="9" name="">
             <a:extLst xmlns:a="http://schemas.openxmlformats.org/drawingml/2006/main">
               <a:ext uri="{FF2B5EF4-FFF2-40B4-BE49-F238E27FC236}">
-                <a16:creationId xmlns:a16="http://schemas.microsoft.com/office/drawing/2014/main" id="{D0C3E03F-356A-4B44-AD82-EB658015AE15}"/>
+                <a16:creationId xmlns:a16="http://schemas.microsoft.com/office/drawing/2014/main" id="{1F8FCFBF-02A7-4882-ABC2-18D43763BD2C}"/>
               </a:ext>
             </a:extLst>
           </p:cNvPr>
@@ -4788,7 +4788,7 @@
           <p:cNvPr id="10" name="">
             <a:extLst xmlns:a="http://schemas.openxmlformats.org/drawingml/2006/main">
               <a:ext uri="{FF2B5EF4-FFF2-40B4-BE49-F238E27FC236}">
-                <a16:creationId xmlns:a16="http://schemas.microsoft.com/office/drawing/2014/main" id="{2F0BE2C3-0526-4F17-BA2E-70F51BBBF026}"/>
+                <a16:creationId xmlns:a16="http://schemas.microsoft.com/office/drawing/2014/main" id="{E6BCAC53-156C-4980-9DE4-4D8C3DD83510}"/>
               </a:ext>
             </a:extLst>
           </p:cNvPr>
@@ -4822,7 +4822,7 @@
           <p:cNvPr id="11" name="">
             <a:extLst xmlns:a="http://schemas.openxmlformats.org/drawingml/2006/main">
               <a:ext uri="{FF2B5EF4-FFF2-40B4-BE49-F238E27FC236}">
-                <a16:creationId xmlns:a16="http://schemas.microsoft.com/office/drawing/2014/main" id="{3C6FEA07-923C-441A-ABCF-36770F213853}"/>
+                <a16:creationId xmlns:a16="http://schemas.microsoft.com/office/drawing/2014/main" id="{0D55A712-D0A3-490B-9473-5EE175CD7D3D}"/>
               </a:ext>
             </a:extLst>
           </p:cNvPr>
@@ -4854,7 +4854,7 @@
           <p:cNvPr id="12" name="">
             <a:extLst xmlns:a="http://schemas.openxmlformats.org/drawingml/2006/main">
               <a:ext uri="{FF2B5EF4-FFF2-40B4-BE49-F238E27FC236}">
-                <a16:creationId xmlns:a16="http://schemas.microsoft.com/office/drawing/2014/main" id="{5CE9CD97-E443-4614-BFF1-BC74F3E29F5D}"/>
+                <a16:creationId xmlns:a16="http://schemas.microsoft.com/office/drawing/2014/main" id="{016B97B6-5F15-413B-8B91-55446942B889}"/>
               </a:ext>
             </a:extLst>
           </p:cNvPr>
@@ -4911,7 +4911,7 @@
           <p:cNvPr id="13" name="">
             <a:extLst xmlns:a="http://schemas.openxmlformats.org/drawingml/2006/main">
               <a:ext uri="{FF2B5EF4-FFF2-40B4-BE49-F238E27FC236}">
-                <a16:creationId xmlns:a16="http://schemas.microsoft.com/office/drawing/2014/main" id="{C4D815AF-0B26-4CFF-84C6-A687F41DBC23}"/>
+                <a16:creationId xmlns:a16="http://schemas.microsoft.com/office/drawing/2014/main" id="{EF9330CF-63B2-4A58-9DE5-7B1F95E64794}"/>
               </a:ext>
             </a:extLst>
           </p:cNvPr>
@@ -4968,7 +4968,7 @@
           <p:cNvPr id="14" name="">
             <a:extLst xmlns:a="http://schemas.openxmlformats.org/drawingml/2006/main">
               <a:ext uri="{FF2B5EF4-FFF2-40B4-BE49-F238E27FC236}">
-                <a16:creationId xmlns:a16="http://schemas.microsoft.com/office/drawing/2014/main" id="{EFEDA06A-CC4C-455D-9E23-EF96A9503CDA}"/>
+                <a16:creationId xmlns:a16="http://schemas.microsoft.com/office/drawing/2014/main" id="{210C1473-BA2D-44D3-85AD-4AD325DD4FA0}"/>
               </a:ext>
             </a:extLst>
           </p:cNvPr>
@@ -5002,7 +5002,7 @@
           <p:cNvPr id="15" name="">
             <a:extLst xmlns:a="http://schemas.openxmlformats.org/drawingml/2006/main">
               <a:ext uri="{FF2B5EF4-FFF2-40B4-BE49-F238E27FC236}">
-                <a16:creationId xmlns:a16="http://schemas.microsoft.com/office/drawing/2014/main" id="{7B232E5F-60DF-4C7D-9793-0CD9DEE996DE}"/>
+                <a16:creationId xmlns:a16="http://schemas.microsoft.com/office/drawing/2014/main" id="{6FA0507A-3BDB-4D90-B059-1ED4ABCEB121}"/>
               </a:ext>
             </a:extLst>
           </p:cNvPr>
@@ -5034,7 +5034,7 @@
           <p:cNvPr id="16" name="">
             <a:extLst xmlns:a="http://schemas.openxmlformats.org/drawingml/2006/main">
               <a:ext uri="{FF2B5EF4-FFF2-40B4-BE49-F238E27FC236}">
-                <a16:creationId xmlns:a16="http://schemas.microsoft.com/office/drawing/2014/main" id="{ABBBE803-17A5-4454-84B4-014579C57A51}"/>
+                <a16:creationId xmlns:a16="http://schemas.microsoft.com/office/drawing/2014/main" id="{2BAD7359-919F-41CE-A8F1-ECDF7602EA6C}"/>
               </a:ext>
             </a:extLst>
           </p:cNvPr>
@@ -5091,7 +5091,7 @@
           <p:cNvPr id="17" name="">
             <a:extLst xmlns:a="http://schemas.openxmlformats.org/drawingml/2006/main">
               <a:ext uri="{FF2B5EF4-FFF2-40B4-BE49-F238E27FC236}">
-                <a16:creationId xmlns:a16="http://schemas.microsoft.com/office/drawing/2014/main" id="{1C3EF0B3-F875-4845-9396-28A4EB9B53FD}"/>
+                <a16:creationId xmlns:a16="http://schemas.microsoft.com/office/drawing/2014/main" id="{0775C738-072D-4C07-8D7C-AA78862EF7A4}"/>
               </a:ext>
             </a:extLst>
           </p:cNvPr>
@@ -5148,7 +5148,7 @@
           <p:cNvPr id="18" name="">
             <a:extLst xmlns:a="http://schemas.openxmlformats.org/drawingml/2006/main">
               <a:ext uri="{FF2B5EF4-FFF2-40B4-BE49-F238E27FC236}">
-                <a16:creationId xmlns:a16="http://schemas.microsoft.com/office/drawing/2014/main" id="{08507084-88B4-4A89-8288-48AD05CD7BB8}"/>
+                <a16:creationId xmlns:a16="http://schemas.microsoft.com/office/drawing/2014/main" id="{AFAEC539-32A6-4103-BF60-1897DABC3116}"/>
               </a:ext>
             </a:extLst>
           </p:cNvPr>
@@ -5182,7 +5182,7 @@
           <p:cNvPr id="19" name="">
             <a:extLst xmlns:a="http://schemas.openxmlformats.org/drawingml/2006/main">
               <a:ext uri="{FF2B5EF4-FFF2-40B4-BE49-F238E27FC236}">
-                <a16:creationId xmlns:a16="http://schemas.microsoft.com/office/drawing/2014/main" id="{A97D8911-EB5A-4299-9ACD-EB6AC9552B98}"/>
+                <a16:creationId xmlns:a16="http://schemas.microsoft.com/office/drawing/2014/main" id="{9763BB82-58A8-4388-BE12-926AC85EF61C}"/>
               </a:ext>
             </a:extLst>
           </p:cNvPr>
@@ -5214,7 +5214,7 @@
           <p:cNvPr id="20" name="">
             <a:extLst xmlns:a="http://schemas.openxmlformats.org/drawingml/2006/main">
               <a:ext uri="{FF2B5EF4-FFF2-40B4-BE49-F238E27FC236}">
-                <a16:creationId xmlns:a16="http://schemas.microsoft.com/office/drawing/2014/main" id="{68D4C21F-AB04-4648-9AB5-5AACFCEBF13F}"/>
+                <a16:creationId xmlns:a16="http://schemas.microsoft.com/office/drawing/2014/main" id="{F9402281-CE94-4A55-9BED-437D7D1836D3}"/>
               </a:ext>
             </a:extLst>
           </p:cNvPr>
@@ -5271,7 +5271,7 @@
           <p:cNvPr id="21" name="">
             <a:extLst xmlns:a="http://schemas.openxmlformats.org/drawingml/2006/main">
               <a:ext uri="{FF2B5EF4-FFF2-40B4-BE49-F238E27FC236}">
-                <a16:creationId xmlns:a16="http://schemas.microsoft.com/office/drawing/2014/main" id="{862F499D-92A7-4446-9915-F1DF1E36BE0E}"/>
+                <a16:creationId xmlns:a16="http://schemas.microsoft.com/office/drawing/2014/main" id="{5B6DD821-26F6-4E20-851D-13A1288FFB63}"/>
               </a:ext>
             </a:extLst>
           </p:cNvPr>
@@ -5328,7 +5328,7 @@
           <p:cNvPr id="22" name="">
             <a:extLst xmlns:a="http://schemas.openxmlformats.org/drawingml/2006/main">
               <a:ext uri="{FF2B5EF4-FFF2-40B4-BE49-F238E27FC236}">
-                <a16:creationId xmlns:a16="http://schemas.microsoft.com/office/drawing/2014/main" id="{FBB2A4CD-4FD6-4867-BA12-816F93621C63}"/>
+                <a16:creationId xmlns:a16="http://schemas.microsoft.com/office/drawing/2014/main" id="{43ADA4DE-F5B3-4BB2-AA3C-AD1CCE2AB0BA}"/>
               </a:ext>
             </a:extLst>
           </p:cNvPr>
@@ -5383,7 +5383,7 @@
     </p:spTree>
     <p:extLst>
       <p:ext uri="{BB962C8B-B14F-4D97-AF65-F5344CB8AC3E}">
-        <p14:creationId xmlns:p14="http://schemas.microsoft.com/office/powerpoint/2010/main" val="1640789777"/>
+        <p14:creationId xmlns:p14="http://schemas.microsoft.com/office/powerpoint/2010/main" val="2070833205"/>
       </p:ext>
     </p:extLst>
   </p:cSld>
@@ -5584,7 +5584,7 @@
           <p:cNvPr id="23" name="">
             <a:extLst xmlns:a="http://schemas.openxmlformats.org/drawingml/2006/main">
               <a:ext uri="{FF2B5EF4-FFF2-40B4-BE49-F238E27FC236}">
-                <a16:creationId xmlns:a16="http://schemas.microsoft.com/office/drawing/2014/main" id="{CF080CFB-DB38-4BE2-AB2B-8F6A3BC111D2}"/>
+                <a16:creationId xmlns:a16="http://schemas.microsoft.com/office/drawing/2014/main" id="{D3145505-7C47-4FD9-A9D9-AC8112642B16}"/>
               </a:ext>
             </a:extLst>
           </p:cNvPr>
@@ -5616,7 +5616,7 @@
           <p:cNvPr id="2" name="">
             <a:extLst xmlns:a="http://schemas.openxmlformats.org/drawingml/2006/main">
               <a:ext uri="{FF2B5EF4-FFF2-40B4-BE49-F238E27FC236}">
-                <a16:creationId xmlns:a16="http://schemas.microsoft.com/office/drawing/2014/main" id="{44A01031-5784-4582-BC01-AD50690F8513}"/>
+                <a16:creationId xmlns:a16="http://schemas.microsoft.com/office/drawing/2014/main" id="{E8155F11-F214-4575-B16B-FF34A0CAC7FC}"/>
               </a:ext>
             </a:extLst>
           </p:cNvPr>
@@ -5673,7 +5673,7 @@
           <p:cNvPr id="3" name="">
             <a:extLst xmlns:a="http://schemas.openxmlformats.org/drawingml/2006/main">
               <a:ext uri="{FF2B5EF4-FFF2-40B4-BE49-F238E27FC236}">
-                <a16:creationId xmlns:a16="http://schemas.microsoft.com/office/drawing/2014/main" id="{A5971EEE-A0C4-4FD8-A485-04AD98CA1294}"/>
+                <a16:creationId xmlns:a16="http://schemas.microsoft.com/office/drawing/2014/main" id="{9066F131-B95B-4AAF-A81E-78D643A4882F}"/>
               </a:ext>
             </a:extLst>
           </p:cNvPr>
@@ -5705,7 +5705,7 @@
           <p:cNvPr id="4" name="">
             <a:extLst xmlns:a="http://schemas.openxmlformats.org/drawingml/2006/main">
               <a:ext uri="{FF2B5EF4-FFF2-40B4-BE49-F238E27FC236}">
-                <a16:creationId xmlns:a16="http://schemas.microsoft.com/office/drawing/2014/main" id="{77B7F5D3-D27E-40F4-B5B9-B2E85257A4A1}"/>
+                <a16:creationId xmlns:a16="http://schemas.microsoft.com/office/drawing/2014/main" id="{37746845-85B9-4BDF-97EB-96E442FD251D}"/>
               </a:ext>
             </a:extLst>
           </p:cNvPr>
@@ -5762,7 +5762,7 @@
           <p:cNvPr id="5" name="">
             <a:extLst xmlns:a="http://schemas.openxmlformats.org/drawingml/2006/main">
               <a:ext uri="{FF2B5EF4-FFF2-40B4-BE49-F238E27FC236}">
-                <a16:creationId xmlns:a16="http://schemas.microsoft.com/office/drawing/2014/main" id="{C97D1578-07FE-4798-B6E2-0C561DB1E8F7}"/>
+                <a16:creationId xmlns:a16="http://schemas.microsoft.com/office/drawing/2014/main" id="{2A540871-BB27-4A8E-9B3F-7AC7204D8704}"/>
               </a:ext>
             </a:extLst>
           </p:cNvPr>
@@ -5819,7 +5819,7 @@
           <p:cNvPr id="6" name="">
             <a:extLst xmlns:a="http://schemas.openxmlformats.org/drawingml/2006/main">
               <a:ext uri="{FF2B5EF4-FFF2-40B4-BE49-F238E27FC236}">
-                <a16:creationId xmlns:a16="http://schemas.microsoft.com/office/drawing/2014/main" id="{802B1DAD-A272-429B-B62D-836E4BDAD72A}"/>
+                <a16:creationId xmlns:a16="http://schemas.microsoft.com/office/drawing/2014/main" id="{C9D3FEFC-2417-4599-A1D6-BED44BE7E135}"/>
               </a:ext>
             </a:extLst>
           </p:cNvPr>
@@ -5876,7 +5876,7 @@
           <p:cNvPr id="7" name="">
             <a:extLst xmlns:a="http://schemas.openxmlformats.org/drawingml/2006/main">
               <a:ext uri="{FF2B5EF4-FFF2-40B4-BE49-F238E27FC236}">
-                <a16:creationId xmlns:a16="http://schemas.microsoft.com/office/drawing/2014/main" id="{4CDD9543-B825-41F7-9A90-BF9A24BE0DC2}"/>
+                <a16:creationId xmlns:a16="http://schemas.microsoft.com/office/drawing/2014/main" id="{4FEDF02C-BD91-4D32-BED2-688B8534338E}"/>
               </a:ext>
             </a:extLst>
           </p:cNvPr>
@@ -5908,7 +5908,7 @@
           <p:cNvPr id="8" name="">
             <a:extLst xmlns:a="http://schemas.openxmlformats.org/drawingml/2006/main">
               <a:ext uri="{FF2B5EF4-FFF2-40B4-BE49-F238E27FC236}">
-                <a16:creationId xmlns:a16="http://schemas.microsoft.com/office/drawing/2014/main" id="{FD8F2431-7283-4A60-B316-3DFCE6E9DDB0}"/>
+                <a16:creationId xmlns:a16="http://schemas.microsoft.com/office/drawing/2014/main" id="{42636C96-4A54-4512-9A25-A41B250152A0}"/>
               </a:ext>
             </a:extLst>
           </p:cNvPr>
@@ -5965,7 +5965,7 @@
           <p:cNvPr id="9" name="">
             <a:extLst xmlns:a="http://schemas.openxmlformats.org/drawingml/2006/main">
               <a:ext uri="{FF2B5EF4-FFF2-40B4-BE49-F238E27FC236}">
-                <a16:creationId xmlns:a16="http://schemas.microsoft.com/office/drawing/2014/main" id="{428B1662-7CA6-430A-A4D0-226E3A98E0A5}"/>
+                <a16:creationId xmlns:a16="http://schemas.microsoft.com/office/drawing/2014/main" id="{CD9315F5-CED2-4340-B53F-06294D0A07B4}"/>
               </a:ext>
             </a:extLst>
           </p:cNvPr>
@@ -6022,7 +6022,7 @@
           <p:cNvPr id="10" name="">
             <a:extLst xmlns:a="http://schemas.openxmlformats.org/drawingml/2006/main">
               <a:ext uri="{FF2B5EF4-FFF2-40B4-BE49-F238E27FC236}">
-                <a16:creationId xmlns:a16="http://schemas.microsoft.com/office/drawing/2014/main" id="{C01B0551-F466-491C-BF4B-F609D9529EEC}"/>
+                <a16:creationId xmlns:a16="http://schemas.microsoft.com/office/drawing/2014/main" id="{117D2DF0-D4EB-4521-B462-8F49C1B19E8A}"/>
               </a:ext>
             </a:extLst>
           </p:cNvPr>
@@ -6056,7 +6056,7 @@
           <p:cNvPr id="11" name="">
             <a:extLst xmlns:a="http://schemas.openxmlformats.org/drawingml/2006/main">
               <a:ext uri="{FF2B5EF4-FFF2-40B4-BE49-F238E27FC236}">
-                <a16:creationId xmlns:a16="http://schemas.microsoft.com/office/drawing/2014/main" id="{E6629E96-7E7E-4C18-AEA6-3A4F7541298E}"/>
+                <a16:creationId xmlns:a16="http://schemas.microsoft.com/office/drawing/2014/main" id="{4DF68E6B-9C16-49F9-85DC-E784E528FD61}"/>
               </a:ext>
             </a:extLst>
           </p:cNvPr>
@@ -6088,7 +6088,7 @@
           <p:cNvPr id="12" name="">
             <a:extLst xmlns:a="http://schemas.openxmlformats.org/drawingml/2006/main">
               <a:ext uri="{FF2B5EF4-FFF2-40B4-BE49-F238E27FC236}">
-                <a16:creationId xmlns:a16="http://schemas.microsoft.com/office/drawing/2014/main" id="{4FA88A06-D557-4B4E-AA77-F5BB426B4231}"/>
+                <a16:creationId xmlns:a16="http://schemas.microsoft.com/office/drawing/2014/main" id="{79DF03FD-41E2-42C2-8693-FA93BC82B84E}"/>
               </a:ext>
             </a:extLst>
           </p:cNvPr>
@@ -6145,7 +6145,7 @@
           <p:cNvPr id="13" name="">
             <a:extLst xmlns:a="http://schemas.openxmlformats.org/drawingml/2006/main">
               <a:ext uri="{FF2B5EF4-FFF2-40B4-BE49-F238E27FC236}">
-                <a16:creationId xmlns:a16="http://schemas.microsoft.com/office/drawing/2014/main" id="{0105D9DC-8F4B-4536-8491-998FC2E2178D}"/>
+                <a16:creationId xmlns:a16="http://schemas.microsoft.com/office/drawing/2014/main" id="{29308EF9-2522-46B3-BB09-A058FEFF5352}"/>
               </a:ext>
             </a:extLst>
           </p:cNvPr>
@@ -6202,7 +6202,7 @@
           <p:cNvPr id="14" name="">
             <a:extLst xmlns:a="http://schemas.openxmlformats.org/drawingml/2006/main">
               <a:ext uri="{FF2B5EF4-FFF2-40B4-BE49-F238E27FC236}">
-                <a16:creationId xmlns:a16="http://schemas.microsoft.com/office/drawing/2014/main" id="{9FC4AD5F-EE34-4EF5-A7D2-F7A962D89231}"/>
+                <a16:creationId xmlns:a16="http://schemas.microsoft.com/office/drawing/2014/main" id="{88351E1E-0B12-473D-AEFF-CB610529166A}"/>
               </a:ext>
             </a:extLst>
           </p:cNvPr>
@@ -6236,7 +6236,7 @@
           <p:cNvPr id="15" name="">
             <a:extLst xmlns:a="http://schemas.openxmlformats.org/drawingml/2006/main">
               <a:ext uri="{FF2B5EF4-FFF2-40B4-BE49-F238E27FC236}">
-                <a16:creationId xmlns:a16="http://schemas.microsoft.com/office/drawing/2014/main" id="{E8DDA0F2-56B8-49F1-83AA-046ED38306AC}"/>
+                <a16:creationId xmlns:a16="http://schemas.microsoft.com/office/drawing/2014/main" id="{A39D44E5-EA9F-423D-8E40-C16384023E58}"/>
               </a:ext>
             </a:extLst>
           </p:cNvPr>
@@ -6268,7 +6268,7 @@
           <p:cNvPr id="16" name="">
             <a:extLst xmlns:a="http://schemas.openxmlformats.org/drawingml/2006/main">
               <a:ext uri="{FF2B5EF4-FFF2-40B4-BE49-F238E27FC236}">
-                <a16:creationId xmlns:a16="http://schemas.microsoft.com/office/drawing/2014/main" id="{C5DEA668-A01A-4285-8490-DEF0C5B22386}"/>
+                <a16:creationId xmlns:a16="http://schemas.microsoft.com/office/drawing/2014/main" id="{E1711CB1-0753-4CA9-BA5F-345EF28E1D0F}"/>
               </a:ext>
             </a:extLst>
           </p:cNvPr>
@@ -6325,7 +6325,7 @@
           <p:cNvPr id="17" name="">
             <a:extLst xmlns:a="http://schemas.openxmlformats.org/drawingml/2006/main">
               <a:ext uri="{FF2B5EF4-FFF2-40B4-BE49-F238E27FC236}">
-                <a16:creationId xmlns:a16="http://schemas.microsoft.com/office/drawing/2014/main" id="{34F17069-2F28-4CA1-838E-49DD5B2B98DE}"/>
+                <a16:creationId xmlns:a16="http://schemas.microsoft.com/office/drawing/2014/main" id="{3BFB68EB-327B-4A16-834B-8D2BC5220532}"/>
               </a:ext>
             </a:extLst>
           </p:cNvPr>
@@ -6382,7 +6382,7 @@
           <p:cNvPr id="18" name="">
             <a:extLst xmlns:a="http://schemas.openxmlformats.org/drawingml/2006/main">
               <a:ext uri="{FF2B5EF4-FFF2-40B4-BE49-F238E27FC236}">
-                <a16:creationId xmlns:a16="http://schemas.microsoft.com/office/drawing/2014/main" id="{61A89127-AD0F-45B4-9371-BFD39E8C1AC5}"/>
+                <a16:creationId xmlns:a16="http://schemas.microsoft.com/office/drawing/2014/main" id="{BA4F3332-66B8-40C3-B9FC-C4C64F8DE9C1}"/>
               </a:ext>
             </a:extLst>
           </p:cNvPr>
@@ -6416,7 +6416,7 @@
           <p:cNvPr id="19" name="">
             <a:extLst xmlns:a="http://schemas.openxmlformats.org/drawingml/2006/main">
               <a:ext uri="{FF2B5EF4-FFF2-40B4-BE49-F238E27FC236}">
-                <a16:creationId xmlns:a16="http://schemas.microsoft.com/office/drawing/2014/main" id="{FD144510-27B2-4431-98C4-123202DC4D64}"/>
+                <a16:creationId xmlns:a16="http://schemas.microsoft.com/office/drawing/2014/main" id="{D93ABBE9-EEF9-485F-BE69-83AEFF3C89B4}"/>
               </a:ext>
             </a:extLst>
           </p:cNvPr>
@@ -6448,7 +6448,7 @@
           <p:cNvPr id="20" name="">
             <a:extLst xmlns:a="http://schemas.openxmlformats.org/drawingml/2006/main">
               <a:ext uri="{FF2B5EF4-FFF2-40B4-BE49-F238E27FC236}">
-                <a16:creationId xmlns:a16="http://schemas.microsoft.com/office/drawing/2014/main" id="{3E115D1F-456D-41E0-ACAD-7BFDF9DC4261}"/>
+                <a16:creationId xmlns:a16="http://schemas.microsoft.com/office/drawing/2014/main" id="{D789BDAA-A6A3-47A3-8330-6190055B032E}"/>
               </a:ext>
             </a:extLst>
           </p:cNvPr>
@@ -6505,7 +6505,7 @@
           <p:cNvPr id="21" name="">
             <a:extLst xmlns:a="http://schemas.openxmlformats.org/drawingml/2006/main">
               <a:ext uri="{FF2B5EF4-FFF2-40B4-BE49-F238E27FC236}">
-                <a16:creationId xmlns:a16="http://schemas.microsoft.com/office/drawing/2014/main" id="{ED49E089-BE4F-4974-9A1B-58909EB8CC00}"/>
+                <a16:creationId xmlns:a16="http://schemas.microsoft.com/office/drawing/2014/main" id="{24660E7E-B1B7-4DD3-8837-027A923E8CD3}"/>
               </a:ext>
             </a:extLst>
           </p:cNvPr>
@@ -6562,7 +6562,7 @@
           <p:cNvPr id="22" name="">
             <a:extLst xmlns:a="http://schemas.openxmlformats.org/drawingml/2006/main">
               <a:ext uri="{FF2B5EF4-FFF2-40B4-BE49-F238E27FC236}">
-                <a16:creationId xmlns:a16="http://schemas.microsoft.com/office/drawing/2014/main" id="{C8CFD8F3-9040-423F-B8B8-3C1288F4B311}"/>
+                <a16:creationId xmlns:a16="http://schemas.microsoft.com/office/drawing/2014/main" id="{167EA184-BA9F-474D-8AD7-E56F9A032122}"/>
               </a:ext>
             </a:extLst>
           </p:cNvPr>
@@ -6617,7 +6617,7 @@
     </p:spTree>
     <p:extLst>
       <p:ext uri="{BB962C8B-B14F-4D97-AF65-F5344CB8AC3E}">
-        <p14:creationId xmlns:p14="http://schemas.microsoft.com/office/powerpoint/2010/main" val="582088776"/>
+        <p14:creationId xmlns:p14="http://schemas.microsoft.com/office/powerpoint/2010/main" val="1650741032"/>
       </p:ext>
     </p:extLst>
   </p:cSld>
@@ -6818,7 +6818,7 @@
           <p:cNvPr id="16" name="">
             <a:extLst xmlns:a="http://schemas.openxmlformats.org/drawingml/2006/main">
               <a:ext uri="{FF2B5EF4-FFF2-40B4-BE49-F238E27FC236}">
-                <a16:creationId xmlns:a16="http://schemas.microsoft.com/office/drawing/2014/main" id="{D1657EAF-3E35-4D52-9711-CDC6FE97868B}"/>
+                <a16:creationId xmlns:a16="http://schemas.microsoft.com/office/drawing/2014/main" id="{1029BBA5-8AA9-43D8-A8A1-E8BF60886B0F}"/>
               </a:ext>
             </a:extLst>
           </p:cNvPr>
@@ -6850,7 +6850,7 @@
           <p:cNvPr id="2" name="">
             <a:extLst xmlns:a="http://schemas.openxmlformats.org/drawingml/2006/main">
               <a:ext uri="{FF2B5EF4-FFF2-40B4-BE49-F238E27FC236}">
-                <a16:creationId xmlns:a16="http://schemas.microsoft.com/office/drawing/2014/main" id="{5A9CB501-943F-4A93-9314-AF085BC105D9}"/>
+                <a16:creationId xmlns:a16="http://schemas.microsoft.com/office/drawing/2014/main" id="{17370B92-E283-4D8C-A395-4AA7A7EF7591}"/>
               </a:ext>
             </a:extLst>
           </p:cNvPr>
@@ -6907,7 +6907,7 @@
           <p:cNvPr id="3" name="">
             <a:extLst xmlns:a="http://schemas.openxmlformats.org/drawingml/2006/main">
               <a:ext uri="{FF2B5EF4-FFF2-40B4-BE49-F238E27FC236}">
-                <a16:creationId xmlns:a16="http://schemas.microsoft.com/office/drawing/2014/main" id="{7C11D024-AAB2-40B6-9B12-C7B25153B7AB}"/>
+                <a16:creationId xmlns:a16="http://schemas.microsoft.com/office/drawing/2014/main" id="{42F0E769-F8A0-43EE-A5C7-DF1E5F391C6D}"/>
               </a:ext>
             </a:extLst>
           </p:cNvPr>
@@ -6939,7 +6939,7 @@
           <p:cNvPr id="4" name="">
             <a:extLst xmlns:a="http://schemas.openxmlformats.org/drawingml/2006/main">
               <a:ext uri="{FF2B5EF4-FFF2-40B4-BE49-F238E27FC236}">
-                <a16:creationId xmlns:a16="http://schemas.microsoft.com/office/drawing/2014/main" id="{257A2A44-D894-4055-BFC5-A4D2209220F8}"/>
+                <a16:creationId xmlns:a16="http://schemas.microsoft.com/office/drawing/2014/main" id="{0CEB7509-4E17-43B6-B798-3E51F340C996}"/>
               </a:ext>
             </a:extLst>
           </p:cNvPr>
@@ -6996,7 +6996,7 @@
           <p:cNvPr id="5" name="">
             <a:extLst xmlns:a="http://schemas.openxmlformats.org/drawingml/2006/main">
               <a:ext uri="{FF2B5EF4-FFF2-40B4-BE49-F238E27FC236}">
-                <a16:creationId xmlns:a16="http://schemas.microsoft.com/office/drawing/2014/main" id="{595511A4-E67F-47FD-8067-6B02ABD66B49}"/>
+                <a16:creationId xmlns:a16="http://schemas.microsoft.com/office/drawing/2014/main" id="{730DC9E6-F4A2-4A46-BF63-A5CCFFE796E7}"/>
               </a:ext>
             </a:extLst>
           </p:cNvPr>
@@ -7053,7 +7053,7 @@
           <p:cNvPr id="6" name="">
             <a:extLst xmlns:a="http://schemas.openxmlformats.org/drawingml/2006/main">
               <a:ext uri="{FF2B5EF4-FFF2-40B4-BE49-F238E27FC236}">
-                <a16:creationId xmlns:a16="http://schemas.microsoft.com/office/drawing/2014/main" id="{0E7C6DED-377F-41B1-B069-7CE4B00DA410}"/>
+                <a16:creationId xmlns:a16="http://schemas.microsoft.com/office/drawing/2014/main" id="{BFD60EC4-4801-4DA4-8172-F6621410EE03}"/>
               </a:ext>
             </a:extLst>
           </p:cNvPr>
@@ -7110,7 +7110,7 @@
           <p:cNvPr id="7" name="">
             <a:extLst xmlns:a="http://schemas.openxmlformats.org/drawingml/2006/main">
               <a:ext uri="{FF2B5EF4-FFF2-40B4-BE49-F238E27FC236}">
-                <a16:creationId xmlns:a16="http://schemas.microsoft.com/office/drawing/2014/main" id="{44AC3C1C-F549-4F96-84B6-4450875C24C4}"/>
+                <a16:creationId xmlns:a16="http://schemas.microsoft.com/office/drawing/2014/main" id="{07EE20A1-1A5E-41E0-87E5-23E9A89A279C}"/>
               </a:ext>
             </a:extLst>
           </p:cNvPr>
@@ -7142,7 +7142,7 @@
           <p:cNvPr id="8" name="">
             <a:extLst xmlns:a="http://schemas.openxmlformats.org/drawingml/2006/main">
               <a:ext uri="{FF2B5EF4-FFF2-40B4-BE49-F238E27FC236}">
-                <a16:creationId xmlns:a16="http://schemas.microsoft.com/office/drawing/2014/main" id="{3C737429-0CEB-426C-B057-910F7E491E47}"/>
+                <a16:creationId xmlns:a16="http://schemas.microsoft.com/office/drawing/2014/main" id="{018D9BCA-443F-4518-AFAB-08A647535B99}"/>
               </a:ext>
             </a:extLst>
           </p:cNvPr>
@@ -7199,7 +7199,7 @@
           <p:cNvPr id="9" name="">
             <a:extLst xmlns:a="http://schemas.openxmlformats.org/drawingml/2006/main">
               <a:ext uri="{FF2B5EF4-FFF2-40B4-BE49-F238E27FC236}">
-                <a16:creationId xmlns:a16="http://schemas.microsoft.com/office/drawing/2014/main" id="{CCD5250A-B97D-485D-80BC-2DBEB591ACC5}"/>
+                <a16:creationId xmlns:a16="http://schemas.microsoft.com/office/drawing/2014/main" id="{12FB7B09-3665-454C-ACA7-4B792978F6FE}"/>
               </a:ext>
             </a:extLst>
           </p:cNvPr>
@@ -7256,7 +7256,7 @@
           <p:cNvPr id="10" name="">
             <a:extLst xmlns:a="http://schemas.openxmlformats.org/drawingml/2006/main">
               <a:ext uri="{FF2B5EF4-FFF2-40B4-BE49-F238E27FC236}">
-                <a16:creationId xmlns:a16="http://schemas.microsoft.com/office/drawing/2014/main" id="{6B9185E2-5DC4-420D-93D0-0E5A6FFAB743}"/>
+                <a16:creationId xmlns:a16="http://schemas.microsoft.com/office/drawing/2014/main" id="{F3288299-183D-4E31-892E-F02D595315D8}"/>
               </a:ext>
             </a:extLst>
           </p:cNvPr>
@@ -7313,7 +7313,7 @@
           <p:cNvPr id="11" name="">
             <a:extLst xmlns:a="http://schemas.openxmlformats.org/drawingml/2006/main">
               <a:ext uri="{FF2B5EF4-FFF2-40B4-BE49-F238E27FC236}">
-                <a16:creationId xmlns:a16="http://schemas.microsoft.com/office/drawing/2014/main" id="{6775FEA5-7CFE-4689-8D64-7DC58E095871}"/>
+                <a16:creationId xmlns:a16="http://schemas.microsoft.com/office/drawing/2014/main" id="{2E6C95E0-A9CA-4AE1-91F7-F5EBC43F2477}"/>
               </a:ext>
             </a:extLst>
           </p:cNvPr>
@@ -7345,7 +7345,7 @@
           <p:cNvPr id="12" name="">
             <a:extLst xmlns:a="http://schemas.openxmlformats.org/drawingml/2006/main">
               <a:ext uri="{FF2B5EF4-FFF2-40B4-BE49-F238E27FC236}">
-                <a16:creationId xmlns:a16="http://schemas.microsoft.com/office/drawing/2014/main" id="{9989FECA-37B5-4C1C-AD71-55C21EA6418A}"/>
+                <a16:creationId xmlns:a16="http://schemas.microsoft.com/office/drawing/2014/main" id="{B7407519-320D-4BF4-808F-FCBA521E7073}"/>
               </a:ext>
             </a:extLst>
           </p:cNvPr>
@@ -7402,7 +7402,7 @@
           <p:cNvPr id="13" name="">
             <a:extLst xmlns:a="http://schemas.openxmlformats.org/drawingml/2006/main">
               <a:ext uri="{FF2B5EF4-FFF2-40B4-BE49-F238E27FC236}">
-                <a16:creationId xmlns:a16="http://schemas.microsoft.com/office/drawing/2014/main" id="{138B8A27-3E9C-4B69-A70D-637B6983D790}"/>
+                <a16:creationId xmlns:a16="http://schemas.microsoft.com/office/drawing/2014/main" id="{48E3CA85-A548-4375-A0BE-18766F4276EE}"/>
               </a:ext>
             </a:extLst>
           </p:cNvPr>
@@ -7459,7 +7459,7 @@
           <p:cNvPr id="14" name="">
             <a:extLst xmlns:a="http://schemas.openxmlformats.org/drawingml/2006/main">
               <a:ext uri="{FF2B5EF4-FFF2-40B4-BE49-F238E27FC236}">
-                <a16:creationId xmlns:a16="http://schemas.microsoft.com/office/drawing/2014/main" id="{B23513D9-0766-499F-9F33-4BF0BFF43236}"/>
+                <a16:creationId xmlns:a16="http://schemas.microsoft.com/office/drawing/2014/main" id="{6B3D28AB-17FD-4D43-BBBF-E0BAC3FCD62F}"/>
               </a:ext>
             </a:extLst>
           </p:cNvPr>
@@ -7516,7 +7516,7 @@
           <p:cNvPr id="15" name="">
             <a:extLst xmlns:a="http://schemas.openxmlformats.org/drawingml/2006/main">
               <a:ext uri="{FF2B5EF4-FFF2-40B4-BE49-F238E27FC236}">
-                <a16:creationId xmlns:a16="http://schemas.microsoft.com/office/drawing/2014/main" id="{AE98B44B-D449-47BD-BE76-1042D6158C3E}"/>
+                <a16:creationId xmlns:a16="http://schemas.microsoft.com/office/drawing/2014/main" id="{E6B418DD-3630-4BF9-9974-DF61BFF1452D}"/>
               </a:ext>
             </a:extLst>
           </p:cNvPr>
@@ -7571,7 +7571,7 @@
     </p:spTree>
     <p:extLst>
       <p:ext uri="{BB962C8B-B14F-4D97-AF65-F5344CB8AC3E}">
-        <p14:creationId xmlns:p14="http://schemas.microsoft.com/office/powerpoint/2010/main" val="707057468"/>
+        <p14:creationId xmlns:p14="http://schemas.microsoft.com/office/powerpoint/2010/main" val="1855872319"/>
       </p:ext>
     </p:extLst>
   </p:cSld>
@@ -7772,7 +7772,7 @@
           <p:cNvPr id="23" name="">
             <a:extLst xmlns:a="http://schemas.openxmlformats.org/drawingml/2006/main">
               <a:ext uri="{FF2B5EF4-FFF2-40B4-BE49-F238E27FC236}">
-                <a16:creationId xmlns:a16="http://schemas.microsoft.com/office/drawing/2014/main" id="{414E2031-7880-4BA4-9AE0-B6431EB67052}"/>
+                <a16:creationId xmlns:a16="http://schemas.microsoft.com/office/drawing/2014/main" id="{6C1FAF7F-F6A0-4CBE-8A50-C132600EA488}"/>
               </a:ext>
             </a:extLst>
           </p:cNvPr>
@@ -7804,7 +7804,7 @@
           <p:cNvPr id="2" name="">
             <a:extLst xmlns:a="http://schemas.openxmlformats.org/drawingml/2006/main">
               <a:ext uri="{FF2B5EF4-FFF2-40B4-BE49-F238E27FC236}">
-                <a16:creationId xmlns:a16="http://schemas.microsoft.com/office/drawing/2014/main" id="{CB4B7D17-BBC9-4BE7-9D39-07070796C978}"/>
+                <a16:creationId xmlns:a16="http://schemas.microsoft.com/office/drawing/2014/main" id="{8BD66A90-2583-4D4A-A685-C26F6B41F354}"/>
               </a:ext>
             </a:extLst>
           </p:cNvPr>
@@ -7861,7 +7861,7 @@
           <p:cNvPr id="3" name="">
             <a:extLst xmlns:a="http://schemas.openxmlformats.org/drawingml/2006/main">
               <a:ext uri="{FF2B5EF4-FFF2-40B4-BE49-F238E27FC236}">
-                <a16:creationId xmlns:a16="http://schemas.microsoft.com/office/drawing/2014/main" id="{A32FD1BD-8DB6-4CEF-9171-2A4DB20F3C68}"/>
+                <a16:creationId xmlns:a16="http://schemas.microsoft.com/office/drawing/2014/main" id="{B973FDB4-8341-4CA3-9380-8A3B69A052C4}"/>
               </a:ext>
             </a:extLst>
           </p:cNvPr>
@@ -7893,7 +7893,7 @@
           <p:cNvPr id="4" name="">
             <a:extLst xmlns:a="http://schemas.openxmlformats.org/drawingml/2006/main">
               <a:ext uri="{FF2B5EF4-FFF2-40B4-BE49-F238E27FC236}">
-                <a16:creationId xmlns:a16="http://schemas.microsoft.com/office/drawing/2014/main" id="{FF3753B5-F5DE-43C5-942D-7929EC87B51D}"/>
+                <a16:creationId xmlns:a16="http://schemas.microsoft.com/office/drawing/2014/main" id="{7B81E294-9DDE-4F04-80D5-D263B93F6789}"/>
               </a:ext>
             </a:extLst>
           </p:cNvPr>
@@ -7950,7 +7950,7 @@
           <p:cNvPr id="5" name="">
             <a:extLst xmlns:a="http://schemas.openxmlformats.org/drawingml/2006/main">
               <a:ext uri="{FF2B5EF4-FFF2-40B4-BE49-F238E27FC236}">
-                <a16:creationId xmlns:a16="http://schemas.microsoft.com/office/drawing/2014/main" id="{72D7E2EA-7E2A-49B3-967B-881D1AF58EBE}"/>
+                <a16:creationId xmlns:a16="http://schemas.microsoft.com/office/drawing/2014/main" id="{A771E27B-B452-483B-B1E1-648302237C86}"/>
               </a:ext>
             </a:extLst>
           </p:cNvPr>
@@ -8007,7 +8007,7 @@
           <p:cNvPr id="6" name="">
             <a:extLst xmlns:a="http://schemas.openxmlformats.org/drawingml/2006/main">
               <a:ext uri="{FF2B5EF4-FFF2-40B4-BE49-F238E27FC236}">
-                <a16:creationId xmlns:a16="http://schemas.microsoft.com/office/drawing/2014/main" id="{A746EB65-37D5-4395-9ED5-FDBEC6382CD5}"/>
+                <a16:creationId xmlns:a16="http://schemas.microsoft.com/office/drawing/2014/main" id="{7AA352BE-796B-42D5-9A2E-D06C93DA8AE0}"/>
               </a:ext>
             </a:extLst>
           </p:cNvPr>
@@ -8064,7 +8064,7 @@
           <p:cNvPr id="7" name="">
             <a:extLst xmlns:a="http://schemas.openxmlformats.org/drawingml/2006/main">
               <a:ext uri="{FF2B5EF4-FFF2-40B4-BE49-F238E27FC236}">
-                <a16:creationId xmlns:a16="http://schemas.microsoft.com/office/drawing/2014/main" id="{F05F5780-AA6D-42F8-AAAA-4200349D3963}"/>
+                <a16:creationId xmlns:a16="http://schemas.microsoft.com/office/drawing/2014/main" id="{285CECF7-6C38-4FA8-BEB4-1A22C0377A53}"/>
               </a:ext>
             </a:extLst>
           </p:cNvPr>
@@ -8096,7 +8096,7 @@
           <p:cNvPr id="8" name="">
             <a:extLst xmlns:a="http://schemas.openxmlformats.org/drawingml/2006/main">
               <a:ext uri="{FF2B5EF4-FFF2-40B4-BE49-F238E27FC236}">
-                <a16:creationId xmlns:a16="http://schemas.microsoft.com/office/drawing/2014/main" id="{4329785B-0567-4C2C-9164-95963AB9C971}"/>
+                <a16:creationId xmlns:a16="http://schemas.microsoft.com/office/drawing/2014/main" id="{D2F8C0C0-187A-48EF-8B55-B3401F7243C3}"/>
               </a:ext>
             </a:extLst>
           </p:cNvPr>
@@ -8153,7 +8153,7 @@
           <p:cNvPr id="9" name="">
             <a:extLst xmlns:a="http://schemas.openxmlformats.org/drawingml/2006/main">
               <a:ext uri="{FF2B5EF4-FFF2-40B4-BE49-F238E27FC236}">
-                <a16:creationId xmlns:a16="http://schemas.microsoft.com/office/drawing/2014/main" id="{4A3E4D41-E0A2-49B6-BEC2-C666DBA1197E}"/>
+                <a16:creationId xmlns:a16="http://schemas.microsoft.com/office/drawing/2014/main" id="{460DF8FC-CF1F-41B8-983F-0721D005530C}"/>
               </a:ext>
             </a:extLst>
           </p:cNvPr>
@@ -8210,19 +8210,19 @@
           <p:cNvPr id="10" name="">
             <a:extLst xmlns:a="http://schemas.openxmlformats.org/drawingml/2006/main">
               <a:ext uri="{FF2B5EF4-FFF2-40B4-BE49-F238E27FC236}">
-                <a16:creationId xmlns:a16="http://schemas.microsoft.com/office/drawing/2014/main" id="{FA2FA01E-BE68-4413-903E-0EC85AB64FF4}"/>
-              </a:ext>
-            </a:extLst>
-          </p:cNvPr>
-          <p:cNvSpPr>
-            <a:spLocks xmlns:a="http://schemas.openxmlformats.org/drawingml/2006/main" noGrp="1"/>
-          </p:cNvSpPr>
-          <p:nvPr/>
-        </p:nvSpPr>
-        <p:spPr>
-          <a:xfrm xmlns:a="http://schemas.openxmlformats.org/drawingml/2006/main">
-            <a:off x="914400" y="1257300"/>
-            <a:ext cx="10363200" cy="781050"/>
+                <a16:creationId xmlns:a16="http://schemas.microsoft.com/office/drawing/2014/main" id="{69AC3296-EA9D-4021-9C02-8EE6D737D8E2}"/>
+              </a:ext>
+            </a:extLst>
+          </p:cNvPr>
+          <p:cNvSpPr>
+            <a:spLocks xmlns:a="http://schemas.openxmlformats.org/drawingml/2006/main" noGrp="1"/>
+          </p:cNvSpPr>
+          <p:nvPr/>
+        </p:nvSpPr>
+        <p:spPr>
+          <a:xfrm xmlns:a="http://schemas.openxmlformats.org/drawingml/2006/main">
+            <a:off x="857250" y="1219200"/>
+            <a:ext cx="10477500" cy="742950"/>
           </a:xfrm>
           <a:prstGeom xmlns:a="http://schemas.openxmlformats.org/drawingml/2006/main" prst="rect">
             <a:avLst/>
@@ -8239,7 +8239,7 @@
           <a:lstStyle xmlns:a="http://schemas.openxmlformats.org/drawingml/2006/main"/>
           <a:p xmlns:a="http://schemas.openxmlformats.org/drawingml/2006/main">
             <a:pPr algn="ctr">
-              <a:defRPr sz="2175" b="1">
+              <a:defRPr sz="2100" b="1">
                 <a:solidFill>
                   <a:srgbClr val="17253A"/>
                 </a:solidFill>
@@ -8249,7 +8249,7 @@
               </a:defRPr>
             </a:pPr>
             <a:r>
-              <a:rPr sz="2175" b="1">
+              <a:rPr sz="2100" b="1">
                 <a:solidFill>
                   <a:srgbClr val="17253A"/>
                 </a:solidFill>
@@ -8267,28 +8267,30 @@
           <p:cNvPr id="11" name="">
             <a:extLst xmlns:a="http://schemas.openxmlformats.org/drawingml/2006/main">
               <a:ext uri="{FF2B5EF4-FFF2-40B4-BE49-F238E27FC236}">
-                <a16:creationId xmlns:a16="http://schemas.microsoft.com/office/drawing/2014/main" id="{1ADDD2DC-233A-4A7B-A3A8-BD7D359A91EA}"/>
-              </a:ext>
-            </a:extLst>
-          </p:cNvPr>
-          <p:cNvSpPr>
-            <a:spLocks xmlns:a="http://schemas.openxmlformats.org/drawingml/2006/main" noGrp="1"/>
-          </p:cNvSpPr>
-          <p:nvPr/>
-        </p:nvSpPr>
-        <p:spPr>
-          <a:xfrm xmlns:a="http://schemas.openxmlformats.org/drawingml/2006/main">
-            <a:off x="1000125" y="2247900"/>
-            <a:ext cx="476250" cy="476250"/>
-          </a:xfrm>
-          <a:prstGeom xmlns:a="http://schemas.openxmlformats.org/drawingml/2006/main" prst="ellipse">
+                <a16:creationId xmlns:a16="http://schemas.microsoft.com/office/drawing/2014/main" id="{F60BA0E9-E6AF-4CA9-9609-6657E180EC28}"/>
+              </a:ext>
+            </a:extLst>
+          </p:cNvPr>
+          <p:cNvSpPr>
+            <a:spLocks xmlns:a="http://schemas.openxmlformats.org/drawingml/2006/main" noGrp="1"/>
+          </p:cNvSpPr>
+          <p:nvPr/>
+        </p:nvSpPr>
+        <p:spPr>
+          <a:xfrm xmlns:a="http://schemas.openxmlformats.org/drawingml/2006/main">
+            <a:off x="971550" y="2124075"/>
+            <a:ext cx="38100" cy="3524250"/>
+          </a:xfrm>
+          <a:prstGeom xmlns:a="http://schemas.openxmlformats.org/drawingml/2006/main" prst="rect">
             <a:avLst/>
           </a:prstGeom>
           <a:solidFill xmlns:a="http://schemas.openxmlformats.org/drawingml/2006/main">
-            <a:srgbClr val="18324A"/>
+            <a:srgbClr val="2C6E73"/>
           </a:solidFill>
           <a:ln xmlns:a="http://schemas.openxmlformats.org/drawingml/2006/main" w="0">
-            <a:noFill/>
+            <a:solidFill>
+              <a:srgbClr val="2C6E73"/>
+            </a:solidFill>
           </a:ln>
         </p:spPr>
       </p:sp>
@@ -8297,19 +8299,19 @@
           <p:cNvPr id="12" name="">
             <a:extLst xmlns:a="http://schemas.openxmlformats.org/drawingml/2006/main">
               <a:ext uri="{FF2B5EF4-FFF2-40B4-BE49-F238E27FC236}">
-                <a16:creationId xmlns:a16="http://schemas.microsoft.com/office/drawing/2014/main" id="{9E25BAD8-2063-464F-915E-E154242EF7A9}"/>
-              </a:ext>
-            </a:extLst>
-          </p:cNvPr>
-          <p:cNvSpPr>
-            <a:spLocks xmlns:a="http://schemas.openxmlformats.org/drawingml/2006/main" noGrp="1"/>
-          </p:cNvSpPr>
-          <p:nvPr/>
-        </p:nvSpPr>
-        <p:spPr>
-          <a:xfrm xmlns:a="http://schemas.openxmlformats.org/drawingml/2006/main">
-            <a:off x="1000125" y="2276475"/>
-            <a:ext cx="476250" cy="419100"/>
+                <a16:creationId xmlns:a16="http://schemas.microsoft.com/office/drawing/2014/main" id="{B53D9CE5-A8B6-4C58-801C-AB65619A60C3}"/>
+              </a:ext>
+            </a:extLst>
+          </p:cNvPr>
+          <p:cNvSpPr>
+            <a:spLocks xmlns:a="http://schemas.openxmlformats.org/drawingml/2006/main" noGrp="1"/>
+          </p:cNvSpPr>
+          <p:nvPr/>
+        </p:nvSpPr>
+        <p:spPr>
+          <a:xfrm xmlns:a="http://schemas.openxmlformats.org/drawingml/2006/main">
+            <a:off x="1162050" y="2200275"/>
+            <a:ext cx="400050" cy="400050"/>
           </a:xfrm>
           <a:prstGeom xmlns:a="http://schemas.openxmlformats.org/drawingml/2006/main" prst="rect">
             <a:avLst/>
@@ -8326,9 +8328,9 @@
           <a:lstStyle xmlns:a="http://schemas.openxmlformats.org/drawingml/2006/main"/>
           <a:p xmlns:a="http://schemas.openxmlformats.org/drawingml/2006/main">
             <a:pPr algn="ctr">
-              <a:defRPr sz="1350" b="1">
-                <a:solidFill>
-                  <a:srgbClr val="FFFFFF"/>
+              <a:defRPr sz="1125" b="1">
+                <a:solidFill>
+                  <a:srgbClr val="2C6E73"/>
                 </a:solidFill>
                 <a:latin typeface="Arial"/>
                 <a:ea typeface="Arial"/>
@@ -8336,9 +8338,9 @@
               </a:defRPr>
             </a:pPr>
             <a:r>
-              <a:rPr sz="1350" b="1">
-                <a:solidFill>
-                  <a:srgbClr val="FFFFFF"/>
+              <a:rPr sz="1125" b="1">
+                <a:solidFill>
+                  <a:srgbClr val="2C6E73"/>
                 </a:solidFill>
                 <a:latin typeface="Arial"/>
                 <a:ea typeface="Arial"/>
@@ -8354,19 +8356,19 @@
           <p:cNvPr id="13" name="">
             <a:extLst xmlns:a="http://schemas.openxmlformats.org/drawingml/2006/main">
               <a:ext uri="{FF2B5EF4-FFF2-40B4-BE49-F238E27FC236}">
-                <a16:creationId xmlns:a16="http://schemas.microsoft.com/office/drawing/2014/main" id="{73EA23FD-31C0-4DF9-BBC5-6AABB57A18D6}"/>
-              </a:ext>
-            </a:extLst>
-          </p:cNvPr>
-          <p:cNvSpPr>
-            <a:spLocks xmlns:a="http://schemas.openxmlformats.org/drawingml/2006/main" noGrp="1"/>
-          </p:cNvSpPr>
-          <p:nvPr/>
-        </p:nvSpPr>
-        <p:spPr>
-          <a:xfrm xmlns:a="http://schemas.openxmlformats.org/drawingml/2006/main">
-            <a:off x="1714500" y="2181225"/>
-            <a:ext cx="9429750" cy="609600"/>
+                <a16:creationId xmlns:a16="http://schemas.microsoft.com/office/drawing/2014/main" id="{49A93C4D-E1C3-4E57-9805-A18440CF8B99}"/>
+              </a:ext>
+            </a:extLst>
+          </p:cNvPr>
+          <p:cNvSpPr>
+            <a:spLocks xmlns:a="http://schemas.openxmlformats.org/drawingml/2006/main" noGrp="1"/>
+          </p:cNvSpPr>
+          <p:nvPr/>
+        </p:nvSpPr>
+        <p:spPr>
+          <a:xfrm xmlns:a="http://schemas.openxmlformats.org/drawingml/2006/main">
+            <a:off x="1714500" y="2114550"/>
+            <a:ext cx="9525000" cy="809625"/>
           </a:xfrm>
           <a:prstGeom xmlns:a="http://schemas.openxmlformats.org/drawingml/2006/main" prst="rect">
             <a:avLst/>
@@ -8383,7 +8385,7 @@
           <a:lstStyle xmlns:a="http://schemas.openxmlformats.org/drawingml/2006/main"/>
           <a:p xmlns:a="http://schemas.openxmlformats.org/drawingml/2006/main">
             <a:pPr algn="l">
-              <a:defRPr sz="1500" b="0">
+              <a:defRPr sz="1725" b="0">
                 <a:solidFill>
                   <a:srgbClr val="17253A"/>
                 </a:solidFill>
@@ -8393,7 +8395,7 @@
               </a:defRPr>
             </a:pPr>
             <a:r>
-              <a:rPr sz="1500" b="0">
+              <a:rPr sz="1725" b="0">
                 <a:solidFill>
                   <a:srgbClr val="17253A"/>
                 </a:solidFill>
@@ -8401,7 +8403,7 @@
                 <a:ea typeface="Arial"/>
                 <a:cs typeface="Arial"/>
               </a:rPr>
-              <a:t>Identify the structure: Identify the goal, constraints and useful information before calculating.</a:t>
+              <a:t>3/5 of the number = 84</a:t>
             </a:r>
           </a:p>
         </p:txBody>
@@ -8411,28 +8413,30 @@
           <p:cNvPr id="14" name="">
             <a:extLst xmlns:a="http://schemas.openxmlformats.org/drawingml/2006/main">
               <a:ext uri="{FF2B5EF4-FFF2-40B4-BE49-F238E27FC236}">
-                <a16:creationId xmlns:a16="http://schemas.microsoft.com/office/drawing/2014/main" id="{54AE15F2-2606-4D50-A6C2-0091E74EA7F1}"/>
-              </a:ext>
-            </a:extLst>
-          </p:cNvPr>
-          <p:cNvSpPr>
-            <a:spLocks xmlns:a="http://schemas.openxmlformats.org/drawingml/2006/main" noGrp="1"/>
-          </p:cNvSpPr>
-          <p:nvPr/>
-        </p:nvSpPr>
-        <p:spPr>
-          <a:xfrm xmlns:a="http://schemas.openxmlformats.org/drawingml/2006/main">
-            <a:off x="1000125" y="2990850"/>
-            <a:ext cx="476250" cy="476250"/>
-          </a:xfrm>
-          <a:prstGeom xmlns:a="http://schemas.openxmlformats.org/drawingml/2006/main" prst="ellipse">
+                <a16:creationId xmlns:a16="http://schemas.microsoft.com/office/drawing/2014/main" id="{8CFC3D6D-3B4A-4020-92EB-48CE379861B1}"/>
+              </a:ext>
+            </a:extLst>
+          </p:cNvPr>
+          <p:cNvSpPr>
+            <a:spLocks xmlns:a="http://schemas.openxmlformats.org/drawingml/2006/main" noGrp="1"/>
+          </p:cNvSpPr>
+          <p:nvPr/>
+        </p:nvSpPr>
+        <p:spPr>
+          <a:xfrm xmlns:a="http://schemas.openxmlformats.org/drawingml/2006/main">
+            <a:off x="1714500" y="2943225"/>
+            <a:ext cx="9334500" cy="9525"/>
+          </a:xfrm>
+          <a:prstGeom xmlns:a="http://schemas.openxmlformats.org/drawingml/2006/main" prst="rect">
             <a:avLst/>
           </a:prstGeom>
           <a:solidFill xmlns:a="http://schemas.openxmlformats.org/drawingml/2006/main">
-            <a:srgbClr val="2C6E73"/>
+            <a:srgbClr val="D9E0E6"/>
           </a:solidFill>
           <a:ln xmlns:a="http://schemas.openxmlformats.org/drawingml/2006/main" w="0">
-            <a:noFill/>
+            <a:solidFill>
+              <a:srgbClr val="D9E0E6"/>
+            </a:solidFill>
           </a:ln>
         </p:spPr>
       </p:sp>
@@ -8441,19 +8445,19 @@
           <p:cNvPr id="15" name="">
             <a:extLst xmlns:a="http://schemas.openxmlformats.org/drawingml/2006/main">
               <a:ext uri="{FF2B5EF4-FFF2-40B4-BE49-F238E27FC236}">
-                <a16:creationId xmlns:a16="http://schemas.microsoft.com/office/drawing/2014/main" id="{FBFFC6EA-0D59-4326-9D30-475D63961AC5}"/>
-              </a:ext>
-            </a:extLst>
-          </p:cNvPr>
-          <p:cNvSpPr>
-            <a:spLocks xmlns:a="http://schemas.openxmlformats.org/drawingml/2006/main" noGrp="1"/>
-          </p:cNvSpPr>
-          <p:nvPr/>
-        </p:nvSpPr>
-        <p:spPr>
-          <a:xfrm xmlns:a="http://schemas.openxmlformats.org/drawingml/2006/main">
-            <a:off x="1000125" y="3019425"/>
-            <a:ext cx="476250" cy="419100"/>
+                <a16:creationId xmlns:a16="http://schemas.microsoft.com/office/drawing/2014/main" id="{73C06BA6-BCFD-459A-B029-3EF562F66801}"/>
+              </a:ext>
+            </a:extLst>
+          </p:cNvPr>
+          <p:cNvSpPr>
+            <a:spLocks xmlns:a="http://schemas.openxmlformats.org/drawingml/2006/main" noGrp="1"/>
+          </p:cNvSpPr>
+          <p:nvPr/>
+        </p:nvSpPr>
+        <p:spPr>
+          <a:xfrm xmlns:a="http://schemas.openxmlformats.org/drawingml/2006/main">
+            <a:off x="1162050" y="3076575"/>
+            <a:ext cx="400050" cy="400050"/>
           </a:xfrm>
           <a:prstGeom xmlns:a="http://schemas.openxmlformats.org/drawingml/2006/main" prst="rect">
             <a:avLst/>
@@ -8470,9 +8474,9 @@
           <a:lstStyle xmlns:a="http://schemas.openxmlformats.org/drawingml/2006/main"/>
           <a:p xmlns:a="http://schemas.openxmlformats.org/drawingml/2006/main">
             <a:pPr algn="ctr">
-              <a:defRPr sz="1350" b="1">
-                <a:solidFill>
-                  <a:srgbClr val="FFFFFF"/>
+              <a:defRPr sz="1125" b="1">
+                <a:solidFill>
+                  <a:srgbClr val="2C6E73"/>
                 </a:solidFill>
                 <a:latin typeface="Arial"/>
                 <a:ea typeface="Arial"/>
@@ -8480,9 +8484,9 @@
               </a:defRPr>
             </a:pPr>
             <a:r>
-              <a:rPr sz="1350" b="1">
-                <a:solidFill>
-                  <a:srgbClr val="FFFFFF"/>
+              <a:rPr sz="1125" b="1">
+                <a:solidFill>
+                  <a:srgbClr val="2C6E73"/>
                 </a:solidFill>
                 <a:latin typeface="Arial"/>
                 <a:ea typeface="Arial"/>
@@ -8498,19 +8502,19 @@
           <p:cNvPr id="16" name="">
             <a:extLst xmlns:a="http://schemas.openxmlformats.org/drawingml/2006/main">
               <a:ext uri="{FF2B5EF4-FFF2-40B4-BE49-F238E27FC236}">
-                <a16:creationId xmlns:a16="http://schemas.microsoft.com/office/drawing/2014/main" id="{4910DE3E-EDF8-4858-83F6-226AF88DBF2F}"/>
-              </a:ext>
-            </a:extLst>
-          </p:cNvPr>
-          <p:cNvSpPr>
-            <a:spLocks xmlns:a="http://schemas.openxmlformats.org/drawingml/2006/main" noGrp="1"/>
-          </p:cNvSpPr>
-          <p:nvPr/>
-        </p:nvSpPr>
-        <p:spPr>
-          <a:xfrm xmlns:a="http://schemas.openxmlformats.org/drawingml/2006/main">
-            <a:off x="1714500" y="2924175"/>
-            <a:ext cx="9429750" cy="609600"/>
+                <a16:creationId xmlns:a16="http://schemas.microsoft.com/office/drawing/2014/main" id="{259869D8-1AFD-41D2-A610-1EE3E0577090}"/>
+              </a:ext>
+            </a:extLst>
+          </p:cNvPr>
+          <p:cNvSpPr>
+            <a:spLocks xmlns:a="http://schemas.openxmlformats.org/drawingml/2006/main" noGrp="1"/>
+          </p:cNvSpPr>
+          <p:nvPr/>
+        </p:nvSpPr>
+        <p:spPr>
+          <a:xfrm xmlns:a="http://schemas.openxmlformats.org/drawingml/2006/main">
+            <a:off x="1714500" y="2990850"/>
+            <a:ext cx="9525000" cy="809625"/>
           </a:xfrm>
           <a:prstGeom xmlns:a="http://schemas.openxmlformats.org/drawingml/2006/main" prst="rect">
             <a:avLst/>
@@ -8527,7 +8531,7 @@
           <a:lstStyle xmlns:a="http://schemas.openxmlformats.org/drawingml/2006/main"/>
           <a:p xmlns:a="http://schemas.openxmlformats.org/drawingml/2006/main">
             <a:pPr algn="l">
-              <a:defRPr sz="1500" b="0">
+              <a:defRPr sz="1725" b="0">
                 <a:solidFill>
                   <a:srgbClr val="17253A"/>
                 </a:solidFill>
@@ -8537,7 +8541,7 @@
               </a:defRPr>
             </a:pPr>
             <a:r>
-              <a:rPr sz="1500" b="0">
+              <a:rPr sz="1725" b="0">
                 <a:solidFill>
                   <a:srgbClr val="17253A"/>
                 </a:solidFill>
@@ -8545,7 +8549,7 @@
                 <a:ea typeface="Arial"/>
                 <a:cs typeface="Arial"/>
               </a:rPr>
-              <a:t>Set up the method: Choose a representation and complete each labelled step.</a:t>
+              <a:t>1/5 = 84 ÷ 3 = 28</a:t>
             </a:r>
           </a:p>
         </p:txBody>
@@ -8555,28 +8559,30 @@
           <p:cNvPr id="17" name="">
             <a:extLst xmlns:a="http://schemas.openxmlformats.org/drawingml/2006/main">
               <a:ext uri="{FF2B5EF4-FFF2-40B4-BE49-F238E27FC236}">
-                <a16:creationId xmlns:a16="http://schemas.microsoft.com/office/drawing/2014/main" id="{4B1DAF27-7FD0-48F6-AEFE-E34D73B54E81}"/>
-              </a:ext>
-            </a:extLst>
-          </p:cNvPr>
-          <p:cNvSpPr>
-            <a:spLocks xmlns:a="http://schemas.openxmlformats.org/drawingml/2006/main" noGrp="1"/>
-          </p:cNvSpPr>
-          <p:nvPr/>
-        </p:nvSpPr>
-        <p:spPr>
-          <a:xfrm xmlns:a="http://schemas.openxmlformats.org/drawingml/2006/main">
-            <a:off x="1000125" y="3733800"/>
-            <a:ext cx="476250" cy="476250"/>
-          </a:xfrm>
-          <a:prstGeom xmlns:a="http://schemas.openxmlformats.org/drawingml/2006/main" prst="ellipse">
+                <a16:creationId xmlns:a16="http://schemas.microsoft.com/office/drawing/2014/main" id="{B4847A21-9DD9-405A-8599-BBAE0632E113}"/>
+              </a:ext>
+            </a:extLst>
+          </p:cNvPr>
+          <p:cNvSpPr>
+            <a:spLocks xmlns:a="http://schemas.openxmlformats.org/drawingml/2006/main" noGrp="1"/>
+          </p:cNvSpPr>
+          <p:nvPr/>
+        </p:nvSpPr>
+        <p:spPr>
+          <a:xfrm xmlns:a="http://schemas.openxmlformats.org/drawingml/2006/main">
+            <a:off x="1714500" y="3819525"/>
+            <a:ext cx="9334500" cy="9525"/>
+          </a:xfrm>
+          <a:prstGeom xmlns:a="http://schemas.openxmlformats.org/drawingml/2006/main" prst="rect">
             <a:avLst/>
           </a:prstGeom>
           <a:solidFill xmlns:a="http://schemas.openxmlformats.org/drawingml/2006/main">
-            <a:srgbClr val="2C6E73"/>
+            <a:srgbClr val="D9E0E6"/>
           </a:solidFill>
           <a:ln xmlns:a="http://schemas.openxmlformats.org/drawingml/2006/main" w="0">
-            <a:noFill/>
+            <a:solidFill>
+              <a:srgbClr val="D9E0E6"/>
+            </a:solidFill>
           </a:ln>
         </p:spPr>
       </p:sp>
@@ -8585,19 +8591,19 @@
           <p:cNvPr id="18" name="">
             <a:extLst xmlns:a="http://schemas.openxmlformats.org/drawingml/2006/main">
               <a:ext uri="{FF2B5EF4-FFF2-40B4-BE49-F238E27FC236}">
-                <a16:creationId xmlns:a16="http://schemas.microsoft.com/office/drawing/2014/main" id="{4CBABE7D-5453-43CA-8023-F41A7EC61D4A}"/>
-              </a:ext>
-            </a:extLst>
-          </p:cNvPr>
-          <p:cNvSpPr>
-            <a:spLocks xmlns:a="http://schemas.openxmlformats.org/drawingml/2006/main" noGrp="1"/>
-          </p:cNvSpPr>
-          <p:nvPr/>
-        </p:nvSpPr>
-        <p:spPr>
-          <a:xfrm xmlns:a="http://schemas.openxmlformats.org/drawingml/2006/main">
-            <a:off x="1000125" y="3762375"/>
-            <a:ext cx="476250" cy="419100"/>
+                <a16:creationId xmlns:a16="http://schemas.microsoft.com/office/drawing/2014/main" id="{41F1B984-3350-4D4E-81B3-B356D467BC11}"/>
+              </a:ext>
+            </a:extLst>
+          </p:cNvPr>
+          <p:cNvSpPr>
+            <a:spLocks xmlns:a="http://schemas.openxmlformats.org/drawingml/2006/main" noGrp="1"/>
+          </p:cNvSpPr>
+          <p:nvPr/>
+        </p:nvSpPr>
+        <p:spPr>
+          <a:xfrm xmlns:a="http://schemas.openxmlformats.org/drawingml/2006/main">
+            <a:off x="1162050" y="3952875"/>
+            <a:ext cx="400050" cy="400050"/>
           </a:xfrm>
           <a:prstGeom xmlns:a="http://schemas.openxmlformats.org/drawingml/2006/main" prst="rect">
             <a:avLst/>
@@ -8614,9 +8620,9 @@
           <a:lstStyle xmlns:a="http://schemas.openxmlformats.org/drawingml/2006/main"/>
           <a:p xmlns:a="http://schemas.openxmlformats.org/drawingml/2006/main">
             <a:pPr algn="ctr">
-              <a:defRPr sz="1350" b="1">
-                <a:solidFill>
-                  <a:srgbClr val="FFFFFF"/>
+              <a:defRPr sz="1125" b="1">
+                <a:solidFill>
+                  <a:srgbClr val="2C6E73"/>
                 </a:solidFill>
                 <a:latin typeface="Arial"/>
                 <a:ea typeface="Arial"/>
@@ -8624,9 +8630,9 @@
               </a:defRPr>
             </a:pPr>
             <a:r>
-              <a:rPr sz="1350" b="1">
-                <a:solidFill>
-                  <a:srgbClr val="FFFFFF"/>
+              <a:rPr sz="1125" b="1">
+                <a:solidFill>
+                  <a:srgbClr val="2C6E73"/>
                 </a:solidFill>
                 <a:latin typeface="Arial"/>
                 <a:ea typeface="Arial"/>
@@ -8642,19 +8648,19 @@
           <p:cNvPr id="19" name="">
             <a:extLst xmlns:a="http://schemas.openxmlformats.org/drawingml/2006/main">
               <a:ext uri="{FF2B5EF4-FFF2-40B4-BE49-F238E27FC236}">
-                <a16:creationId xmlns:a16="http://schemas.microsoft.com/office/drawing/2014/main" id="{8A0F0CE3-22C7-4F96-A14D-EB17575E2BD5}"/>
-              </a:ext>
-            </a:extLst>
-          </p:cNvPr>
-          <p:cNvSpPr>
-            <a:spLocks xmlns:a="http://schemas.openxmlformats.org/drawingml/2006/main" noGrp="1"/>
-          </p:cNvSpPr>
-          <p:nvPr/>
-        </p:nvSpPr>
-        <p:spPr>
-          <a:xfrm xmlns:a="http://schemas.openxmlformats.org/drawingml/2006/main">
-            <a:off x="1714500" y="3667125"/>
-            <a:ext cx="9429750" cy="609600"/>
+                <a16:creationId xmlns:a16="http://schemas.microsoft.com/office/drawing/2014/main" id="{413724BB-DBA3-4F8F-A6E1-2DFB24B51287}"/>
+              </a:ext>
+            </a:extLst>
+          </p:cNvPr>
+          <p:cNvSpPr>
+            <a:spLocks xmlns:a="http://schemas.openxmlformats.org/drawingml/2006/main" noGrp="1"/>
+          </p:cNvSpPr>
+          <p:nvPr/>
+        </p:nvSpPr>
+        <p:spPr>
+          <a:xfrm xmlns:a="http://schemas.openxmlformats.org/drawingml/2006/main">
+            <a:off x="1714500" y="3867150"/>
+            <a:ext cx="9525000" cy="809625"/>
           </a:xfrm>
           <a:prstGeom xmlns:a="http://schemas.openxmlformats.org/drawingml/2006/main" prst="rect">
             <a:avLst/>
@@ -8671,7 +8677,7 @@
           <a:lstStyle xmlns:a="http://schemas.openxmlformats.org/drawingml/2006/main"/>
           <a:p xmlns:a="http://schemas.openxmlformats.org/drawingml/2006/main">
             <a:pPr algn="l">
-              <a:defRPr sz="1500" b="0">
+              <a:defRPr sz="1725" b="0">
                 <a:solidFill>
                   <a:srgbClr val="17253A"/>
                 </a:solidFill>
@@ -8681,7 +8687,7 @@
               </a:defRPr>
             </a:pPr>
             <a:r>
-              <a:rPr sz="1500" b="0">
+              <a:rPr sz="1725" b="0">
                 <a:solidFill>
                   <a:srgbClr val="17253A"/>
                 </a:solidFill>
@@ -8689,7 +8695,7 @@
                 <a:ea typeface="Arial"/>
                 <a:cs typeface="Arial"/>
               </a:rPr>
-              <a:t>Complete the calculation: 49.</a:t>
+              <a:t>Whole = 28 × 5 = 140</a:t>
             </a:r>
           </a:p>
         </p:txBody>
@@ -8699,28 +8705,30 @@
           <p:cNvPr id="20" name="">
             <a:extLst xmlns:a="http://schemas.openxmlformats.org/drawingml/2006/main">
               <a:ext uri="{FF2B5EF4-FFF2-40B4-BE49-F238E27FC236}">
-                <a16:creationId xmlns:a16="http://schemas.microsoft.com/office/drawing/2014/main" id="{299FD407-0732-4CE7-A254-3B0A97065D01}"/>
-              </a:ext>
-            </a:extLst>
-          </p:cNvPr>
-          <p:cNvSpPr>
-            <a:spLocks xmlns:a="http://schemas.openxmlformats.org/drawingml/2006/main" noGrp="1"/>
-          </p:cNvSpPr>
-          <p:nvPr/>
-        </p:nvSpPr>
-        <p:spPr>
-          <a:xfrm xmlns:a="http://schemas.openxmlformats.org/drawingml/2006/main">
-            <a:off x="1000125" y="4476750"/>
-            <a:ext cx="476250" cy="476250"/>
-          </a:xfrm>
-          <a:prstGeom xmlns:a="http://schemas.openxmlformats.org/drawingml/2006/main" prst="ellipse">
+                <a16:creationId xmlns:a16="http://schemas.microsoft.com/office/drawing/2014/main" id="{3424FC76-008D-49A1-9064-467D971EF0CA}"/>
+              </a:ext>
+            </a:extLst>
+          </p:cNvPr>
+          <p:cNvSpPr>
+            <a:spLocks xmlns:a="http://schemas.openxmlformats.org/drawingml/2006/main" noGrp="1"/>
+          </p:cNvSpPr>
+          <p:nvPr/>
+        </p:nvSpPr>
+        <p:spPr>
+          <a:xfrm xmlns:a="http://schemas.openxmlformats.org/drawingml/2006/main">
+            <a:off x="1714500" y="4695825"/>
+            <a:ext cx="9334500" cy="9525"/>
+          </a:xfrm>
+          <a:prstGeom xmlns:a="http://schemas.openxmlformats.org/drawingml/2006/main" prst="rect">
             <a:avLst/>
           </a:prstGeom>
           <a:solidFill xmlns:a="http://schemas.openxmlformats.org/drawingml/2006/main">
-            <a:srgbClr val="2C6E73"/>
+            <a:srgbClr val="D9E0E6"/>
           </a:solidFill>
           <a:ln xmlns:a="http://schemas.openxmlformats.org/drawingml/2006/main" w="0">
-            <a:noFill/>
+            <a:solidFill>
+              <a:srgbClr val="D9E0E6"/>
+            </a:solidFill>
           </a:ln>
         </p:spPr>
       </p:sp>
@@ -8729,19 +8737,19 @@
           <p:cNvPr id="21" name="">
             <a:extLst xmlns:a="http://schemas.openxmlformats.org/drawingml/2006/main">
               <a:ext uri="{FF2B5EF4-FFF2-40B4-BE49-F238E27FC236}">
-                <a16:creationId xmlns:a16="http://schemas.microsoft.com/office/drawing/2014/main" id="{8C3CCB16-E086-4479-9D78-71228F374E0A}"/>
-              </a:ext>
-            </a:extLst>
-          </p:cNvPr>
-          <p:cNvSpPr>
-            <a:spLocks xmlns:a="http://schemas.openxmlformats.org/drawingml/2006/main" noGrp="1"/>
-          </p:cNvSpPr>
-          <p:nvPr/>
-        </p:nvSpPr>
-        <p:spPr>
-          <a:xfrm xmlns:a="http://schemas.openxmlformats.org/drawingml/2006/main">
-            <a:off x="1000125" y="4505325"/>
-            <a:ext cx="476250" cy="419100"/>
+                <a16:creationId xmlns:a16="http://schemas.microsoft.com/office/drawing/2014/main" id="{9FA385A9-979F-432D-A7C2-E3FE17950640}"/>
+              </a:ext>
+            </a:extLst>
+          </p:cNvPr>
+          <p:cNvSpPr>
+            <a:spLocks xmlns:a="http://schemas.openxmlformats.org/drawingml/2006/main" noGrp="1"/>
+          </p:cNvSpPr>
+          <p:nvPr/>
+        </p:nvSpPr>
+        <p:spPr>
+          <a:xfrm xmlns:a="http://schemas.openxmlformats.org/drawingml/2006/main">
+            <a:off x="1162050" y="4829175"/>
+            <a:ext cx="400050" cy="400050"/>
           </a:xfrm>
           <a:prstGeom xmlns:a="http://schemas.openxmlformats.org/drawingml/2006/main" prst="rect">
             <a:avLst/>
@@ -8758,9 +8766,9 @@
           <a:lstStyle xmlns:a="http://schemas.openxmlformats.org/drawingml/2006/main"/>
           <a:p xmlns:a="http://schemas.openxmlformats.org/drawingml/2006/main">
             <a:pPr algn="ctr">
-              <a:defRPr sz="1350" b="1">
-                <a:solidFill>
-                  <a:srgbClr val="FFFFFF"/>
+              <a:defRPr sz="1125" b="1">
+                <a:solidFill>
+                  <a:srgbClr val="2F785D"/>
                 </a:solidFill>
                 <a:latin typeface="Arial"/>
                 <a:ea typeface="Arial"/>
@@ -8768,9 +8776,9 @@
               </a:defRPr>
             </a:pPr>
             <a:r>
-              <a:rPr sz="1350" b="1">
-                <a:solidFill>
-                  <a:srgbClr val="FFFFFF"/>
+              <a:rPr sz="1125" b="1">
+                <a:solidFill>
+                  <a:srgbClr val="2F785D"/>
                 </a:solidFill>
                 <a:latin typeface="Arial"/>
                 <a:ea typeface="Arial"/>
@@ -8786,19 +8794,19 @@
           <p:cNvPr id="22" name="">
             <a:extLst xmlns:a="http://schemas.openxmlformats.org/drawingml/2006/main">
               <a:ext uri="{FF2B5EF4-FFF2-40B4-BE49-F238E27FC236}">
-                <a16:creationId xmlns:a16="http://schemas.microsoft.com/office/drawing/2014/main" id="{D395AD65-CCE2-4D28-8139-4050C6A769E4}"/>
-              </a:ext>
-            </a:extLst>
-          </p:cNvPr>
-          <p:cNvSpPr>
-            <a:spLocks xmlns:a="http://schemas.openxmlformats.org/drawingml/2006/main" noGrp="1"/>
-          </p:cNvSpPr>
-          <p:nvPr/>
-        </p:nvSpPr>
-        <p:spPr>
-          <a:xfrm xmlns:a="http://schemas.openxmlformats.org/drawingml/2006/main">
-            <a:off x="1714500" y="4410075"/>
-            <a:ext cx="9429750" cy="609600"/>
+                <a16:creationId xmlns:a16="http://schemas.microsoft.com/office/drawing/2014/main" id="{B206AB5C-EA4B-4A66-9D11-BBC7FCA85EEA}"/>
+              </a:ext>
+            </a:extLst>
+          </p:cNvPr>
+          <p:cNvSpPr>
+            <a:spLocks xmlns:a="http://schemas.openxmlformats.org/drawingml/2006/main" noGrp="1"/>
+          </p:cNvSpPr>
+          <p:nvPr/>
+        </p:nvSpPr>
+        <p:spPr>
+          <a:xfrm xmlns:a="http://schemas.openxmlformats.org/drawingml/2006/main">
+            <a:off x="1714500" y="4743450"/>
+            <a:ext cx="9525000" cy="809625"/>
           </a:xfrm>
           <a:prstGeom xmlns:a="http://schemas.openxmlformats.org/drawingml/2006/main" prst="rect">
             <a:avLst/>
@@ -8815,7 +8823,7 @@
           <a:lstStyle xmlns:a="http://schemas.openxmlformats.org/drawingml/2006/main"/>
           <a:p xmlns:a="http://schemas.openxmlformats.org/drawingml/2006/main">
             <a:pPr algn="l">
-              <a:defRPr sz="1500" b="1">
+              <a:defRPr sz="1725" b="1">
                 <a:solidFill>
                   <a:srgbClr val="2F785D"/>
                 </a:solidFill>
@@ -8825,7 +8833,7 @@
               </a:defRPr>
             </a:pPr>
             <a:r>
-              <a:rPr sz="1500" b="1">
+              <a:rPr sz="1725" b="1">
                 <a:solidFill>
                   <a:srgbClr val="2F785D"/>
                 </a:solidFill>
@@ -8833,7 +8841,7 @@
                 <a:ea typeface="Arial"/>
                 <a:cs typeface="Arial"/>
               </a:rPr>
-              <a:t>Check the result: Check the solution and explain why it satisfies every condition.</a:t>
+              <a:t>35% of 140 = 49</a:t>
             </a:r>
           </a:p>
         </p:txBody>
@@ -8841,7 +8849,7 @@
     </p:spTree>
     <p:extLst>
       <p:ext uri="{BB962C8B-B14F-4D97-AF65-F5344CB8AC3E}">
-        <p14:creationId xmlns:p14="http://schemas.microsoft.com/office/powerpoint/2010/main" val="1748505792"/>
+        <p14:creationId xmlns:p14="http://schemas.microsoft.com/office/powerpoint/2010/main" val="1233562506"/>
       </p:ext>
     </p:extLst>
   </p:cSld>
@@ -9134,7 +9142,7 @@
           <p:cNvPr id="15" name="">
             <a:extLst xmlns:a="http://schemas.openxmlformats.org/drawingml/2006/main">
               <a:ext uri="{FF2B5EF4-FFF2-40B4-BE49-F238E27FC236}">
-                <a16:creationId xmlns:a16="http://schemas.microsoft.com/office/drawing/2014/main" id="{DE428D24-0CEE-4B05-BA77-CE0A51AA7819}"/>
+                <a16:creationId xmlns:a16="http://schemas.microsoft.com/office/drawing/2014/main" id="{120A52B6-A2C2-423A-90C0-B08A1F5ADB52}"/>
               </a:ext>
             </a:extLst>
           </p:cNvPr>
@@ -9166,7 +9174,7 @@
           <p:cNvPr id="2" name="">
             <a:extLst xmlns:a="http://schemas.openxmlformats.org/drawingml/2006/main">
               <a:ext uri="{FF2B5EF4-FFF2-40B4-BE49-F238E27FC236}">
-                <a16:creationId xmlns:a16="http://schemas.microsoft.com/office/drawing/2014/main" id="{AF3C1722-D3F9-4D57-927B-F4E84FB48972}"/>
+                <a16:creationId xmlns:a16="http://schemas.microsoft.com/office/drawing/2014/main" id="{120BBB6F-1556-4627-8B3D-AE7891EE92D2}"/>
               </a:ext>
             </a:extLst>
           </p:cNvPr>
@@ -9223,7 +9231,7 @@
           <p:cNvPr id="3" name="">
             <a:extLst xmlns:a="http://schemas.openxmlformats.org/drawingml/2006/main">
               <a:ext uri="{FF2B5EF4-FFF2-40B4-BE49-F238E27FC236}">
-                <a16:creationId xmlns:a16="http://schemas.microsoft.com/office/drawing/2014/main" id="{9967EA26-5601-48B8-8847-42CFAA79FC04}"/>
+                <a16:creationId xmlns:a16="http://schemas.microsoft.com/office/drawing/2014/main" id="{24F82C8D-E5AE-44CB-86D4-4D57DFA2E05D}"/>
               </a:ext>
             </a:extLst>
           </p:cNvPr>
@@ -9255,7 +9263,7 @@
           <p:cNvPr id="4" name="">
             <a:extLst xmlns:a="http://schemas.openxmlformats.org/drawingml/2006/main">
               <a:ext uri="{FF2B5EF4-FFF2-40B4-BE49-F238E27FC236}">
-                <a16:creationId xmlns:a16="http://schemas.microsoft.com/office/drawing/2014/main" id="{DA0173DE-6EF2-4BCE-923A-AE3EA0911376}"/>
+                <a16:creationId xmlns:a16="http://schemas.microsoft.com/office/drawing/2014/main" id="{D9E23466-2F3C-4D3A-9E59-48A7572B4C45}"/>
               </a:ext>
             </a:extLst>
           </p:cNvPr>
@@ -9312,7 +9320,7 @@
           <p:cNvPr id="5" name="">
             <a:extLst xmlns:a="http://schemas.openxmlformats.org/drawingml/2006/main">
               <a:ext uri="{FF2B5EF4-FFF2-40B4-BE49-F238E27FC236}">
-                <a16:creationId xmlns:a16="http://schemas.microsoft.com/office/drawing/2014/main" id="{F9FCAD6A-80B0-4CBD-95AE-AE18F1D65B73}"/>
+                <a16:creationId xmlns:a16="http://schemas.microsoft.com/office/drawing/2014/main" id="{EF73B588-255B-4315-B36E-504A769C53F7}"/>
               </a:ext>
             </a:extLst>
           </p:cNvPr>
@@ -9369,7 +9377,7 @@
           <p:cNvPr id="6" name="">
             <a:extLst xmlns:a="http://schemas.openxmlformats.org/drawingml/2006/main">
               <a:ext uri="{FF2B5EF4-FFF2-40B4-BE49-F238E27FC236}">
-                <a16:creationId xmlns:a16="http://schemas.microsoft.com/office/drawing/2014/main" id="{A032FB6E-72BE-4053-A3F3-CC86857B2AE9}"/>
+                <a16:creationId xmlns:a16="http://schemas.microsoft.com/office/drawing/2014/main" id="{B76032F6-510E-4FC4-B115-3AF3B813FD2C}"/>
               </a:ext>
             </a:extLst>
           </p:cNvPr>
@@ -9426,7 +9434,7 @@
           <p:cNvPr id="7" name="">
             <a:extLst xmlns:a="http://schemas.openxmlformats.org/drawingml/2006/main">
               <a:ext uri="{FF2B5EF4-FFF2-40B4-BE49-F238E27FC236}">
-                <a16:creationId xmlns:a16="http://schemas.microsoft.com/office/drawing/2014/main" id="{0119B8DE-1E50-4985-B97B-6430159F1E14}"/>
+                <a16:creationId xmlns:a16="http://schemas.microsoft.com/office/drawing/2014/main" id="{7BC141F8-4AF9-43F2-B183-7E369051E6AA}"/>
               </a:ext>
             </a:extLst>
           </p:cNvPr>
@@ -9458,7 +9466,7 @@
           <p:cNvPr id="8" name="">
             <a:extLst xmlns:a="http://schemas.openxmlformats.org/drawingml/2006/main">
               <a:ext uri="{FF2B5EF4-FFF2-40B4-BE49-F238E27FC236}">
-                <a16:creationId xmlns:a16="http://schemas.microsoft.com/office/drawing/2014/main" id="{67B8EDB8-0DD7-45A7-9EB2-C88D11506F22}"/>
+                <a16:creationId xmlns:a16="http://schemas.microsoft.com/office/drawing/2014/main" id="{A6733A16-47E4-457A-8020-04122278CC80}"/>
               </a:ext>
             </a:extLst>
           </p:cNvPr>
@@ -9515,7 +9523,7 @@
           <p:cNvPr id="9" name="">
             <a:extLst xmlns:a="http://schemas.openxmlformats.org/drawingml/2006/main">
               <a:ext uri="{FF2B5EF4-FFF2-40B4-BE49-F238E27FC236}">
-                <a16:creationId xmlns:a16="http://schemas.microsoft.com/office/drawing/2014/main" id="{272F0A03-365A-4ABC-BB54-9AAF56E0E4A2}"/>
+                <a16:creationId xmlns:a16="http://schemas.microsoft.com/office/drawing/2014/main" id="{39DADC09-DE02-4E06-84C3-8FC8AF364246}"/>
               </a:ext>
             </a:extLst>
           </p:cNvPr>
@@ -9572,7 +9580,7 @@
           <p:cNvPr id="10" name="">
             <a:extLst xmlns:a="http://schemas.openxmlformats.org/drawingml/2006/main">
               <a:ext uri="{FF2B5EF4-FFF2-40B4-BE49-F238E27FC236}">
-                <a16:creationId xmlns:a16="http://schemas.microsoft.com/office/drawing/2014/main" id="{C07B88B8-B759-44C2-8276-CADAE06BCF83}"/>
+                <a16:creationId xmlns:a16="http://schemas.microsoft.com/office/drawing/2014/main" id="{77BA0384-27BB-4C91-AC11-390B00F2AD17}"/>
               </a:ext>
             </a:extLst>
           </p:cNvPr>
@@ -9629,7 +9637,7 @@
           <p:cNvPr id="11" name="">
             <a:extLst xmlns:a="http://schemas.openxmlformats.org/drawingml/2006/main">
               <a:ext uri="{FF2B5EF4-FFF2-40B4-BE49-F238E27FC236}">
-                <a16:creationId xmlns:a16="http://schemas.microsoft.com/office/drawing/2014/main" id="{80C54F4A-8B0E-41A4-B0FB-3F9B276E65BD}"/>
+                <a16:creationId xmlns:a16="http://schemas.microsoft.com/office/drawing/2014/main" id="{F8064AF9-8716-4868-B215-86FC170F34F4}"/>
               </a:ext>
             </a:extLst>
           </p:cNvPr>
@@ -9686,7 +9694,7 @@
           <p:cNvPr id="12" name="">
             <a:extLst xmlns:a="http://schemas.openxmlformats.org/drawingml/2006/main">
               <a:ext uri="{FF2B5EF4-FFF2-40B4-BE49-F238E27FC236}">
-                <a16:creationId xmlns:a16="http://schemas.microsoft.com/office/drawing/2014/main" id="{D81DB38E-058E-4A45-AC55-2F43BAE164E7}"/>
+                <a16:creationId xmlns:a16="http://schemas.microsoft.com/office/drawing/2014/main" id="{A1F00B9D-2262-4F49-8EA5-3BE45CCF313A}"/>
               </a:ext>
             </a:extLst>
           </p:cNvPr>
@@ -9718,7 +9726,7 @@
           <p:cNvPr id="13" name="">
             <a:extLst xmlns:a="http://schemas.openxmlformats.org/drawingml/2006/main">
               <a:ext uri="{FF2B5EF4-FFF2-40B4-BE49-F238E27FC236}">
-                <a16:creationId xmlns:a16="http://schemas.microsoft.com/office/drawing/2014/main" id="{6BFC8F7F-6DB3-4F85-9416-B8D2313D8DFA}"/>
+                <a16:creationId xmlns:a16="http://schemas.microsoft.com/office/drawing/2014/main" id="{39DE4957-A0D5-462E-B655-9B361E689CC7}"/>
               </a:ext>
             </a:extLst>
           </p:cNvPr>
@@ -9775,7 +9783,7 @@
           <p:cNvPr id="14" name="">
             <a:extLst xmlns:a="http://schemas.openxmlformats.org/drawingml/2006/main">
               <a:ext uri="{FF2B5EF4-FFF2-40B4-BE49-F238E27FC236}">
-                <a16:creationId xmlns:a16="http://schemas.microsoft.com/office/drawing/2014/main" id="{066B657C-BE5E-4C35-BB23-B146BC268A44}"/>
+                <a16:creationId xmlns:a16="http://schemas.microsoft.com/office/drawing/2014/main" id="{3DFE76E8-DF5D-4577-A25C-439498B25B2B}"/>
               </a:ext>
             </a:extLst>
           </p:cNvPr>
@@ -9830,7 +9838,7 @@
     </p:spTree>
     <p:extLst>
       <p:ext uri="{BB962C8B-B14F-4D97-AF65-F5344CB8AC3E}">
-        <p14:creationId xmlns:p14="http://schemas.microsoft.com/office/powerpoint/2010/main" val="299765927"/>
+        <p14:creationId xmlns:p14="http://schemas.microsoft.com/office/powerpoint/2010/main" val="1124264903"/>
       </p:ext>
     </p:extLst>
   </p:cSld>
@@ -10031,7 +10039,7 @@
           <p:cNvPr id="16" name="">
             <a:extLst xmlns:a="http://schemas.openxmlformats.org/drawingml/2006/main">
               <a:ext uri="{FF2B5EF4-FFF2-40B4-BE49-F238E27FC236}">
-                <a16:creationId xmlns:a16="http://schemas.microsoft.com/office/drawing/2014/main" id="{60EFC0D1-9C37-4D29-A170-64B9DAB5A723}"/>
+                <a16:creationId xmlns:a16="http://schemas.microsoft.com/office/drawing/2014/main" id="{928F68EE-0810-478D-B501-7EFD70ADD939}"/>
               </a:ext>
             </a:extLst>
           </p:cNvPr>
@@ -10063,7 +10071,7 @@
           <p:cNvPr id="2" name="">
             <a:extLst xmlns:a="http://schemas.openxmlformats.org/drawingml/2006/main">
               <a:ext uri="{FF2B5EF4-FFF2-40B4-BE49-F238E27FC236}">
-                <a16:creationId xmlns:a16="http://schemas.microsoft.com/office/drawing/2014/main" id="{19CC9CD7-4D26-4D91-A756-A13B667B53A3}"/>
+                <a16:creationId xmlns:a16="http://schemas.microsoft.com/office/drawing/2014/main" id="{B30E0392-B499-47F6-A964-E445CE874F00}"/>
               </a:ext>
             </a:extLst>
           </p:cNvPr>
@@ -10120,7 +10128,7 @@
           <p:cNvPr id="3" name="">
             <a:extLst xmlns:a="http://schemas.openxmlformats.org/drawingml/2006/main">
               <a:ext uri="{FF2B5EF4-FFF2-40B4-BE49-F238E27FC236}">
-                <a16:creationId xmlns:a16="http://schemas.microsoft.com/office/drawing/2014/main" id="{9A1CAA13-3A5F-484E-A23A-9262A11DD38C}"/>
+                <a16:creationId xmlns:a16="http://schemas.microsoft.com/office/drawing/2014/main" id="{50FA225C-7BF1-4E18-8C7E-221222A4B138}"/>
               </a:ext>
             </a:extLst>
           </p:cNvPr>
@@ -10152,7 +10160,7 @@
           <p:cNvPr id="4" name="">
             <a:extLst xmlns:a="http://schemas.openxmlformats.org/drawingml/2006/main">
               <a:ext uri="{FF2B5EF4-FFF2-40B4-BE49-F238E27FC236}">
-                <a16:creationId xmlns:a16="http://schemas.microsoft.com/office/drawing/2014/main" id="{9ACB1000-E8ED-4BA3-8245-2CE2DE6FD709}"/>
+                <a16:creationId xmlns:a16="http://schemas.microsoft.com/office/drawing/2014/main" id="{1524E2ED-00AD-4323-916B-95BE5D7AB42C}"/>
               </a:ext>
             </a:extLst>
           </p:cNvPr>
@@ -10209,7 +10217,7 @@
           <p:cNvPr id="5" name="">
             <a:extLst xmlns:a="http://schemas.openxmlformats.org/drawingml/2006/main">
               <a:ext uri="{FF2B5EF4-FFF2-40B4-BE49-F238E27FC236}">
-                <a16:creationId xmlns:a16="http://schemas.microsoft.com/office/drawing/2014/main" id="{52B9FE1A-22AA-49C8-843F-BBDA7931C1DB}"/>
+                <a16:creationId xmlns:a16="http://schemas.microsoft.com/office/drawing/2014/main" id="{4D56E1F6-B13B-49A1-B9D3-6A0C3B2EB484}"/>
               </a:ext>
             </a:extLst>
           </p:cNvPr>
@@ -10266,7 +10274,7 @@
           <p:cNvPr id="6" name="">
             <a:extLst xmlns:a="http://schemas.openxmlformats.org/drawingml/2006/main">
               <a:ext uri="{FF2B5EF4-FFF2-40B4-BE49-F238E27FC236}">
-                <a16:creationId xmlns:a16="http://schemas.microsoft.com/office/drawing/2014/main" id="{74B76EDD-86FA-40E8-A19C-1A90F11BD204}"/>
+                <a16:creationId xmlns:a16="http://schemas.microsoft.com/office/drawing/2014/main" id="{2060E841-A237-4AD9-9B73-3A145F045045}"/>
               </a:ext>
             </a:extLst>
           </p:cNvPr>
@@ -10323,7 +10331,7 @@
           <p:cNvPr id="7" name="">
             <a:extLst xmlns:a="http://schemas.openxmlformats.org/drawingml/2006/main">
               <a:ext uri="{FF2B5EF4-FFF2-40B4-BE49-F238E27FC236}">
-                <a16:creationId xmlns:a16="http://schemas.microsoft.com/office/drawing/2014/main" id="{57F94B99-ECBF-42D3-8C2D-603B0BF589E5}"/>
+                <a16:creationId xmlns:a16="http://schemas.microsoft.com/office/drawing/2014/main" id="{18AFE6CB-5C73-4148-A371-5E4E9DBA7241}"/>
               </a:ext>
             </a:extLst>
           </p:cNvPr>
@@ -10355,7 +10363,7 @@
           <p:cNvPr id="8" name="">
             <a:extLst xmlns:a="http://schemas.openxmlformats.org/drawingml/2006/main">
               <a:ext uri="{FF2B5EF4-FFF2-40B4-BE49-F238E27FC236}">
-                <a16:creationId xmlns:a16="http://schemas.microsoft.com/office/drawing/2014/main" id="{FF0BB5E3-C954-4161-BEC0-E514938D2042}"/>
+                <a16:creationId xmlns:a16="http://schemas.microsoft.com/office/drawing/2014/main" id="{82F0A5A7-22E6-4250-A927-E2DAB0318E71}"/>
               </a:ext>
             </a:extLst>
           </p:cNvPr>
@@ -10412,7 +10420,7 @@
           <p:cNvPr id="9" name="">
             <a:extLst xmlns:a="http://schemas.openxmlformats.org/drawingml/2006/main">
               <a:ext uri="{FF2B5EF4-FFF2-40B4-BE49-F238E27FC236}">
-                <a16:creationId xmlns:a16="http://schemas.microsoft.com/office/drawing/2014/main" id="{DD8267C6-6044-48D7-9779-1D5BF059C074}"/>
+                <a16:creationId xmlns:a16="http://schemas.microsoft.com/office/drawing/2014/main" id="{0A50946C-3F68-420A-85C5-2400D97735DC}"/>
               </a:ext>
             </a:extLst>
           </p:cNvPr>
@@ -10469,7 +10477,7 @@
           <p:cNvPr id="10" name="">
             <a:extLst xmlns:a="http://schemas.openxmlformats.org/drawingml/2006/main">
               <a:ext uri="{FF2B5EF4-FFF2-40B4-BE49-F238E27FC236}">
-                <a16:creationId xmlns:a16="http://schemas.microsoft.com/office/drawing/2014/main" id="{C31F7CD2-75FD-482C-A62A-3B03BC9F3BBB}"/>
+                <a16:creationId xmlns:a16="http://schemas.microsoft.com/office/drawing/2014/main" id="{5BF7B7C7-2E1C-4404-AB26-886D859501F9}"/>
               </a:ext>
             </a:extLst>
           </p:cNvPr>
@@ -10526,7 +10534,7 @@
           <p:cNvPr id="11" name="">
             <a:extLst xmlns:a="http://schemas.openxmlformats.org/drawingml/2006/main">
               <a:ext uri="{FF2B5EF4-FFF2-40B4-BE49-F238E27FC236}">
-                <a16:creationId xmlns:a16="http://schemas.microsoft.com/office/drawing/2014/main" id="{9BE02478-C92F-45DE-8435-B21531A66B19}"/>
+                <a16:creationId xmlns:a16="http://schemas.microsoft.com/office/drawing/2014/main" id="{4DF5D9F5-DF7D-4D91-BB15-25FE14809B8C}"/>
               </a:ext>
             </a:extLst>
           </p:cNvPr>
@@ -10583,7 +10591,7 @@
           <p:cNvPr id="12" name="">
             <a:extLst xmlns:a="http://schemas.openxmlformats.org/drawingml/2006/main">
               <a:ext uri="{FF2B5EF4-FFF2-40B4-BE49-F238E27FC236}">
-                <a16:creationId xmlns:a16="http://schemas.microsoft.com/office/drawing/2014/main" id="{55858EAC-9B82-47F9-BFFA-6F777A87187B}"/>
+                <a16:creationId xmlns:a16="http://schemas.microsoft.com/office/drawing/2014/main" id="{C70A9460-BFA0-4B56-BC48-7116FD1779B0}"/>
               </a:ext>
             </a:extLst>
           </p:cNvPr>
@@ -10640,7 +10648,7 @@
           <p:cNvPr id="13" name="">
             <a:extLst xmlns:a="http://schemas.openxmlformats.org/drawingml/2006/main">
               <a:ext uri="{FF2B5EF4-FFF2-40B4-BE49-F238E27FC236}">
-                <a16:creationId xmlns:a16="http://schemas.microsoft.com/office/drawing/2014/main" id="{CE485AEA-E9D4-495C-A325-981002713932}"/>
+                <a16:creationId xmlns:a16="http://schemas.microsoft.com/office/drawing/2014/main" id="{936FB00C-7DFA-4D15-928B-B69EF0F11858}"/>
               </a:ext>
             </a:extLst>
           </p:cNvPr>
@@ -10697,7 +10705,7 @@
           <p:cNvPr id="14" name="">
             <a:extLst xmlns:a="http://schemas.openxmlformats.org/drawingml/2006/main">
               <a:ext uri="{FF2B5EF4-FFF2-40B4-BE49-F238E27FC236}">
-                <a16:creationId xmlns:a16="http://schemas.microsoft.com/office/drawing/2014/main" id="{61D954B7-FAA1-43DC-B29B-40615F6E7F43}"/>
+                <a16:creationId xmlns:a16="http://schemas.microsoft.com/office/drawing/2014/main" id="{849D6B2D-BDCC-406B-AB1A-F308C22E527B}"/>
               </a:ext>
             </a:extLst>
           </p:cNvPr>
@@ -10754,7 +10762,7 @@
           <p:cNvPr id="15" name="">
             <a:extLst xmlns:a="http://schemas.openxmlformats.org/drawingml/2006/main">
               <a:ext uri="{FF2B5EF4-FFF2-40B4-BE49-F238E27FC236}">
-                <a16:creationId xmlns:a16="http://schemas.microsoft.com/office/drawing/2014/main" id="{7E807955-9B6B-4642-A514-2CDEFAF3477F}"/>
+                <a16:creationId xmlns:a16="http://schemas.microsoft.com/office/drawing/2014/main" id="{C0700716-ECF1-4ED5-B5B1-DF29EBE20C66}"/>
               </a:ext>
             </a:extLst>
           </p:cNvPr>
@@ -10809,7 +10817,7 @@
     </p:spTree>
     <p:extLst>
       <p:ext uri="{BB962C8B-B14F-4D97-AF65-F5344CB8AC3E}">
-        <p14:creationId xmlns:p14="http://schemas.microsoft.com/office/powerpoint/2010/main" val="1349677906"/>
+        <p14:creationId xmlns:p14="http://schemas.microsoft.com/office/powerpoint/2010/main" val="930999675"/>
       </p:ext>
     </p:extLst>
   </p:cSld>
@@ -10964,7 +10972,7 @@
           <p:cNvPr id="16" name="">
             <a:extLst xmlns:a="http://schemas.openxmlformats.org/drawingml/2006/main">
               <a:ext uri="{FF2B5EF4-FFF2-40B4-BE49-F238E27FC236}">
-                <a16:creationId xmlns:a16="http://schemas.microsoft.com/office/drawing/2014/main" id="{F4A73F4A-C998-4E1A-8308-85A3284FD619}"/>
+                <a16:creationId xmlns:a16="http://schemas.microsoft.com/office/drawing/2014/main" id="{6332A88F-B14F-4FCC-9AD3-7A5AF8960C9A}"/>
               </a:ext>
             </a:extLst>
           </p:cNvPr>
@@ -10996,7 +11004,7 @@
           <p:cNvPr id="2" name="">
             <a:extLst xmlns:a="http://schemas.openxmlformats.org/drawingml/2006/main">
               <a:ext uri="{FF2B5EF4-FFF2-40B4-BE49-F238E27FC236}">
-                <a16:creationId xmlns:a16="http://schemas.microsoft.com/office/drawing/2014/main" id="{399EFB50-4146-46A1-B8CD-3B9B79223558}"/>
+                <a16:creationId xmlns:a16="http://schemas.microsoft.com/office/drawing/2014/main" id="{5395D1E5-36FD-4085-AF13-40A033DFEE41}"/>
               </a:ext>
             </a:extLst>
           </p:cNvPr>
@@ -11053,7 +11061,7 @@
           <p:cNvPr id="3" name="">
             <a:extLst xmlns:a="http://schemas.openxmlformats.org/drawingml/2006/main">
               <a:ext uri="{FF2B5EF4-FFF2-40B4-BE49-F238E27FC236}">
-                <a16:creationId xmlns:a16="http://schemas.microsoft.com/office/drawing/2014/main" id="{9C20BB12-CF22-4138-B4C3-FBDDB0A7BD50}"/>
+                <a16:creationId xmlns:a16="http://schemas.microsoft.com/office/drawing/2014/main" id="{A10F744D-646A-4E05-A577-1E06AB7F6FF6}"/>
               </a:ext>
             </a:extLst>
           </p:cNvPr>
@@ -11085,7 +11093,7 @@
           <p:cNvPr id="4" name="">
             <a:extLst xmlns:a="http://schemas.openxmlformats.org/drawingml/2006/main">
               <a:ext uri="{FF2B5EF4-FFF2-40B4-BE49-F238E27FC236}">
-                <a16:creationId xmlns:a16="http://schemas.microsoft.com/office/drawing/2014/main" id="{D3723667-CCF9-4C2A-AD7F-C23871EFAE91}"/>
+                <a16:creationId xmlns:a16="http://schemas.microsoft.com/office/drawing/2014/main" id="{DDEB44D5-0633-4A7F-A4FB-2F17AFD444E2}"/>
               </a:ext>
             </a:extLst>
           </p:cNvPr>
@@ -11142,7 +11150,7 @@
           <p:cNvPr id="5" name="">
             <a:extLst xmlns:a="http://schemas.openxmlformats.org/drawingml/2006/main">
               <a:ext uri="{FF2B5EF4-FFF2-40B4-BE49-F238E27FC236}">
-                <a16:creationId xmlns:a16="http://schemas.microsoft.com/office/drawing/2014/main" id="{5B163C25-9A05-4989-8F74-A220FA2F8DAE}"/>
+                <a16:creationId xmlns:a16="http://schemas.microsoft.com/office/drawing/2014/main" id="{01457807-E703-43F2-A254-8F635ABE6D27}"/>
               </a:ext>
             </a:extLst>
           </p:cNvPr>
@@ -11199,7 +11207,7 @@
           <p:cNvPr id="6" name="">
             <a:extLst xmlns:a="http://schemas.openxmlformats.org/drawingml/2006/main">
               <a:ext uri="{FF2B5EF4-FFF2-40B4-BE49-F238E27FC236}">
-                <a16:creationId xmlns:a16="http://schemas.microsoft.com/office/drawing/2014/main" id="{9D7087B6-8116-48B1-BB57-59B7E4369EA1}"/>
+                <a16:creationId xmlns:a16="http://schemas.microsoft.com/office/drawing/2014/main" id="{F14B40A5-2CBA-4B10-9DB6-0992AB423C72}"/>
               </a:ext>
             </a:extLst>
           </p:cNvPr>
@@ -11256,7 +11264,7 @@
           <p:cNvPr id="7" name="">
             <a:extLst xmlns:a="http://schemas.openxmlformats.org/drawingml/2006/main">
               <a:ext uri="{FF2B5EF4-FFF2-40B4-BE49-F238E27FC236}">
-                <a16:creationId xmlns:a16="http://schemas.microsoft.com/office/drawing/2014/main" id="{452F68CF-85F8-4580-B3D0-9C0D75D10F3F}"/>
+                <a16:creationId xmlns:a16="http://schemas.microsoft.com/office/drawing/2014/main" id="{78378835-2900-473C-B194-1F03B45C87EF}"/>
               </a:ext>
             </a:extLst>
           </p:cNvPr>
@@ -11288,7 +11296,7 @@
           <p:cNvPr id="8" name="">
             <a:extLst xmlns:a="http://schemas.openxmlformats.org/drawingml/2006/main">
               <a:ext uri="{FF2B5EF4-FFF2-40B4-BE49-F238E27FC236}">
-                <a16:creationId xmlns:a16="http://schemas.microsoft.com/office/drawing/2014/main" id="{19A7CC54-9FBA-45D1-AB34-F30B4F632F1A}"/>
+                <a16:creationId xmlns:a16="http://schemas.microsoft.com/office/drawing/2014/main" id="{4E0FF31A-675A-4B48-88B5-27321AD49C22}"/>
               </a:ext>
             </a:extLst>
           </p:cNvPr>
@@ -11345,7 +11353,7 @@
           <p:cNvPr id="9" name="">
             <a:extLst xmlns:a="http://schemas.openxmlformats.org/drawingml/2006/main">
               <a:ext uri="{FF2B5EF4-FFF2-40B4-BE49-F238E27FC236}">
-                <a16:creationId xmlns:a16="http://schemas.microsoft.com/office/drawing/2014/main" id="{F46463DF-10D2-478B-9BC3-B6CA256A8B52}"/>
+                <a16:creationId xmlns:a16="http://schemas.microsoft.com/office/drawing/2014/main" id="{013D56F9-97BA-4723-B4D2-F3187744F8D8}"/>
               </a:ext>
             </a:extLst>
           </p:cNvPr>
@@ -11406,7 +11414,7 @@
           <p:nvPr/>
         </p:nvPicPr>
         <p:blipFill>
-          <a:blip xmlns:r="http://schemas.openxmlformats.org/officeDocument/2006/relationships" xmlns:a="http://schemas.openxmlformats.org/drawingml/2006/main" r:embed="Rda3681f45c534590"/>
+          <a:blip xmlns:r="http://schemas.openxmlformats.org/officeDocument/2006/relationships" xmlns:a="http://schemas.openxmlformats.org/drawingml/2006/main" r:embed="Ra65ce0f33d0a4886"/>
           <a:stretch xmlns:a="http://schemas.openxmlformats.org/drawingml/2006/main"/>
         </p:blipFill>
         <p:spPr>
@@ -11424,7 +11432,7 @@
           <p:cNvPr id="11" name="">
             <a:extLst xmlns:a="http://schemas.openxmlformats.org/drawingml/2006/main">
               <a:ext uri="{FF2B5EF4-FFF2-40B4-BE49-F238E27FC236}">
-                <a16:creationId xmlns:a16="http://schemas.microsoft.com/office/drawing/2014/main" id="{E56D1C5F-1003-4E8B-ACE3-82213B50018E}"/>
+                <a16:creationId xmlns:a16="http://schemas.microsoft.com/office/drawing/2014/main" id="{F7B82D15-0B6F-42A7-A184-3AB96918E8E7}"/>
               </a:ext>
             </a:extLst>
           </p:cNvPr>
@@ -11481,7 +11489,7 @@
           <p:cNvPr id="12" name="">
             <a:extLst xmlns:a="http://schemas.openxmlformats.org/drawingml/2006/main">
               <a:ext uri="{FF2B5EF4-FFF2-40B4-BE49-F238E27FC236}">
-                <a16:creationId xmlns:a16="http://schemas.microsoft.com/office/drawing/2014/main" id="{5435FCD3-7060-4ED8-B87D-E38F153D57EB}"/>
+                <a16:creationId xmlns:a16="http://schemas.microsoft.com/office/drawing/2014/main" id="{E58297A8-4ADE-4268-8D13-856F878514C6}"/>
               </a:ext>
             </a:extLst>
           </p:cNvPr>
@@ -11538,7 +11546,7 @@
           <p:cNvPr id="13" name="">
             <a:extLst xmlns:a="http://schemas.openxmlformats.org/drawingml/2006/main">
               <a:ext uri="{FF2B5EF4-FFF2-40B4-BE49-F238E27FC236}">
-                <a16:creationId xmlns:a16="http://schemas.microsoft.com/office/drawing/2014/main" id="{3AD1A6C1-5617-4FF5-A005-36935694E708}"/>
+                <a16:creationId xmlns:a16="http://schemas.microsoft.com/office/drawing/2014/main" id="{827B7BC0-FE0F-4489-A619-4B3557527DE7}"/>
               </a:ext>
             </a:extLst>
           </p:cNvPr>
@@ -11570,7 +11578,7 @@
           <p:cNvPr id="14" name="">
             <a:extLst xmlns:a="http://schemas.openxmlformats.org/drawingml/2006/main">
               <a:ext uri="{FF2B5EF4-FFF2-40B4-BE49-F238E27FC236}">
-                <a16:creationId xmlns:a16="http://schemas.microsoft.com/office/drawing/2014/main" id="{04B8E572-5044-4F11-9329-CB7F555742C2}"/>
+                <a16:creationId xmlns:a16="http://schemas.microsoft.com/office/drawing/2014/main" id="{DA663458-9F77-446A-B408-7738C6A8A2A8}"/>
               </a:ext>
             </a:extLst>
           </p:cNvPr>
@@ -11627,7 +11635,7 @@
           <p:cNvPr id="15" name="">
             <a:extLst xmlns:a="http://schemas.openxmlformats.org/drawingml/2006/main">
               <a:ext uri="{FF2B5EF4-FFF2-40B4-BE49-F238E27FC236}">
-                <a16:creationId xmlns:a16="http://schemas.microsoft.com/office/drawing/2014/main" id="{D5714F64-0EFA-460D-9B1D-0D530AF32A91}"/>
+                <a16:creationId xmlns:a16="http://schemas.microsoft.com/office/drawing/2014/main" id="{C2879A36-4AAB-4A15-B2DC-E929B6717BEE}"/>
               </a:ext>
             </a:extLst>
           </p:cNvPr>
@@ -11682,7 +11690,7 @@
     </p:spTree>
     <p:extLst>
       <p:ext uri="{BB962C8B-B14F-4D97-AF65-F5344CB8AC3E}">
-        <p14:creationId xmlns:p14="http://schemas.microsoft.com/office/powerpoint/2010/main" val="2072107379"/>
+        <p14:creationId xmlns:p14="http://schemas.microsoft.com/office/powerpoint/2010/main" val="678291383"/>
       </p:ext>
     </p:extLst>
   </p:cSld>
@@ -11837,7 +11845,7 @@
           <p:cNvPr id="23" name="">
             <a:extLst xmlns:a="http://schemas.openxmlformats.org/drawingml/2006/main">
               <a:ext uri="{FF2B5EF4-FFF2-40B4-BE49-F238E27FC236}">
-                <a16:creationId xmlns:a16="http://schemas.microsoft.com/office/drawing/2014/main" id="{79D515B2-0FE4-45BA-9489-0CB98622D8ED}"/>
+                <a16:creationId xmlns:a16="http://schemas.microsoft.com/office/drawing/2014/main" id="{F16DA639-C2D0-43B9-A95B-0E424450C308}"/>
               </a:ext>
             </a:extLst>
           </p:cNvPr>
@@ -11869,7 +11877,7 @@
           <p:cNvPr id="2" name="">
             <a:extLst xmlns:a="http://schemas.openxmlformats.org/drawingml/2006/main">
               <a:ext uri="{FF2B5EF4-FFF2-40B4-BE49-F238E27FC236}">
-                <a16:creationId xmlns:a16="http://schemas.microsoft.com/office/drawing/2014/main" id="{F422B3B2-9F99-4F9A-A18C-CD35B352472E}"/>
+                <a16:creationId xmlns:a16="http://schemas.microsoft.com/office/drawing/2014/main" id="{54D266F5-A7EF-4DC7-972E-54D1F1C55642}"/>
               </a:ext>
             </a:extLst>
           </p:cNvPr>
@@ -11926,7 +11934,7 @@
           <p:cNvPr id="3" name="">
             <a:extLst xmlns:a="http://schemas.openxmlformats.org/drawingml/2006/main">
               <a:ext uri="{FF2B5EF4-FFF2-40B4-BE49-F238E27FC236}">
-                <a16:creationId xmlns:a16="http://schemas.microsoft.com/office/drawing/2014/main" id="{E847C0AE-F6AF-4EF7-8431-EA9DA93B5B5C}"/>
+                <a16:creationId xmlns:a16="http://schemas.microsoft.com/office/drawing/2014/main" id="{7BFFFFB1-0F97-41B7-B10F-BB75B802DCAB}"/>
               </a:ext>
             </a:extLst>
           </p:cNvPr>
@@ -11958,7 +11966,7 @@
           <p:cNvPr id="4" name="">
             <a:extLst xmlns:a="http://schemas.openxmlformats.org/drawingml/2006/main">
               <a:ext uri="{FF2B5EF4-FFF2-40B4-BE49-F238E27FC236}">
-                <a16:creationId xmlns:a16="http://schemas.microsoft.com/office/drawing/2014/main" id="{774EF6CF-BAB1-41A8-95FC-9143EBB2D8B4}"/>
+                <a16:creationId xmlns:a16="http://schemas.microsoft.com/office/drawing/2014/main" id="{E2775417-69B7-4437-AB6C-8E13BA85CA23}"/>
               </a:ext>
             </a:extLst>
           </p:cNvPr>
@@ -12015,7 +12023,7 @@
           <p:cNvPr id="5" name="">
             <a:extLst xmlns:a="http://schemas.openxmlformats.org/drawingml/2006/main">
               <a:ext uri="{FF2B5EF4-FFF2-40B4-BE49-F238E27FC236}">
-                <a16:creationId xmlns:a16="http://schemas.microsoft.com/office/drawing/2014/main" id="{504CA6CF-05A8-4EB7-9D36-CAD75438ECDF}"/>
+                <a16:creationId xmlns:a16="http://schemas.microsoft.com/office/drawing/2014/main" id="{8A8308F1-D52C-4185-9053-140266ED8350}"/>
               </a:ext>
             </a:extLst>
           </p:cNvPr>
@@ -12072,7 +12080,7 @@
           <p:cNvPr id="6" name="">
             <a:extLst xmlns:a="http://schemas.openxmlformats.org/drawingml/2006/main">
               <a:ext uri="{FF2B5EF4-FFF2-40B4-BE49-F238E27FC236}">
-                <a16:creationId xmlns:a16="http://schemas.microsoft.com/office/drawing/2014/main" id="{11253606-16BE-4534-8E53-7ED813B6CF28}"/>
+                <a16:creationId xmlns:a16="http://schemas.microsoft.com/office/drawing/2014/main" id="{6EA032F8-74AB-438F-A52E-E631618B1DC4}"/>
               </a:ext>
             </a:extLst>
           </p:cNvPr>
@@ -12129,7 +12137,7 @@
           <p:cNvPr id="7" name="">
             <a:extLst xmlns:a="http://schemas.openxmlformats.org/drawingml/2006/main">
               <a:ext uri="{FF2B5EF4-FFF2-40B4-BE49-F238E27FC236}">
-                <a16:creationId xmlns:a16="http://schemas.microsoft.com/office/drawing/2014/main" id="{455A7DA6-417E-4803-9078-419DE176C610}"/>
+                <a16:creationId xmlns:a16="http://schemas.microsoft.com/office/drawing/2014/main" id="{BC820FA3-6255-4106-9737-B22131215F94}"/>
               </a:ext>
             </a:extLst>
           </p:cNvPr>
@@ -12161,7 +12169,7 @@
           <p:cNvPr id="8" name="">
             <a:extLst xmlns:a="http://schemas.openxmlformats.org/drawingml/2006/main">
               <a:ext uri="{FF2B5EF4-FFF2-40B4-BE49-F238E27FC236}">
-                <a16:creationId xmlns:a16="http://schemas.microsoft.com/office/drawing/2014/main" id="{C9E51A7B-87FC-4DBE-AB1B-C89C0D395601}"/>
+                <a16:creationId xmlns:a16="http://schemas.microsoft.com/office/drawing/2014/main" id="{A0C1CD3D-28B2-4759-AD73-15A1B8BCD054}"/>
               </a:ext>
             </a:extLst>
           </p:cNvPr>
@@ -12218,7 +12226,7 @@
           <p:cNvPr id="9" name="">
             <a:extLst xmlns:a="http://schemas.openxmlformats.org/drawingml/2006/main">
               <a:ext uri="{FF2B5EF4-FFF2-40B4-BE49-F238E27FC236}">
-                <a16:creationId xmlns:a16="http://schemas.microsoft.com/office/drawing/2014/main" id="{31766510-4AAA-4394-86BF-3FBFA8356B15}"/>
+                <a16:creationId xmlns:a16="http://schemas.microsoft.com/office/drawing/2014/main" id="{0F43BEA0-499D-45D2-BA9A-B7C172EDB251}"/>
               </a:ext>
             </a:extLst>
           </p:cNvPr>
@@ -12275,7 +12283,7 @@
           <p:cNvPr id="10" name="">
             <a:extLst xmlns:a="http://schemas.openxmlformats.org/drawingml/2006/main">
               <a:ext uri="{FF2B5EF4-FFF2-40B4-BE49-F238E27FC236}">
-                <a16:creationId xmlns:a16="http://schemas.microsoft.com/office/drawing/2014/main" id="{1DC26C86-AD54-43E3-8460-2E891104FB52}"/>
+                <a16:creationId xmlns:a16="http://schemas.microsoft.com/office/drawing/2014/main" id="{DC78E5F2-666E-4551-941B-93F6D4734F67}"/>
               </a:ext>
             </a:extLst>
           </p:cNvPr>
@@ -12309,7 +12317,7 @@
           <p:cNvPr id="11" name="">
             <a:extLst xmlns:a="http://schemas.openxmlformats.org/drawingml/2006/main">
               <a:ext uri="{FF2B5EF4-FFF2-40B4-BE49-F238E27FC236}">
-                <a16:creationId xmlns:a16="http://schemas.microsoft.com/office/drawing/2014/main" id="{CB2C8BAE-C6EB-4A59-8D23-580E8F91F0EE}"/>
+                <a16:creationId xmlns:a16="http://schemas.microsoft.com/office/drawing/2014/main" id="{71F1FE45-846F-4858-8914-F8EF27E81711}"/>
               </a:ext>
             </a:extLst>
           </p:cNvPr>
@@ -12341,7 +12349,7 @@
           <p:cNvPr id="12" name="">
             <a:extLst xmlns:a="http://schemas.openxmlformats.org/drawingml/2006/main">
               <a:ext uri="{FF2B5EF4-FFF2-40B4-BE49-F238E27FC236}">
-                <a16:creationId xmlns:a16="http://schemas.microsoft.com/office/drawing/2014/main" id="{78AD1F67-CFC3-4A9A-9BD2-779D09CEBC48}"/>
+                <a16:creationId xmlns:a16="http://schemas.microsoft.com/office/drawing/2014/main" id="{D05D3ED1-6985-4C90-B3CE-6FCEDFFA99BB}"/>
               </a:ext>
             </a:extLst>
           </p:cNvPr>
@@ -12398,7 +12406,7 @@
           <p:cNvPr id="13" name="">
             <a:extLst xmlns:a="http://schemas.openxmlformats.org/drawingml/2006/main">
               <a:ext uri="{FF2B5EF4-FFF2-40B4-BE49-F238E27FC236}">
-                <a16:creationId xmlns:a16="http://schemas.microsoft.com/office/drawing/2014/main" id="{50C61E56-23DE-478A-AF87-6BFB610A3CC2}"/>
+                <a16:creationId xmlns:a16="http://schemas.microsoft.com/office/drawing/2014/main" id="{8B605EB2-CE6D-48E1-9E21-2941CE372BBD}"/>
               </a:ext>
             </a:extLst>
           </p:cNvPr>
@@ -12455,7 +12463,7 @@
           <p:cNvPr id="14" name="">
             <a:extLst xmlns:a="http://schemas.openxmlformats.org/drawingml/2006/main">
               <a:ext uri="{FF2B5EF4-FFF2-40B4-BE49-F238E27FC236}">
-                <a16:creationId xmlns:a16="http://schemas.microsoft.com/office/drawing/2014/main" id="{40EDE9B4-635B-4D63-9AB2-6E9D95B63FC8}"/>
+                <a16:creationId xmlns:a16="http://schemas.microsoft.com/office/drawing/2014/main" id="{890964AD-3645-410D-83C7-390EF84F70C3}"/>
               </a:ext>
             </a:extLst>
           </p:cNvPr>
@@ -12489,7 +12497,7 @@
           <p:cNvPr id="15" name="">
             <a:extLst xmlns:a="http://schemas.openxmlformats.org/drawingml/2006/main">
               <a:ext uri="{FF2B5EF4-FFF2-40B4-BE49-F238E27FC236}">
-                <a16:creationId xmlns:a16="http://schemas.microsoft.com/office/drawing/2014/main" id="{4424FF6F-46E5-4ABC-99A8-3668F8F4BFBD}"/>
+                <a16:creationId xmlns:a16="http://schemas.microsoft.com/office/drawing/2014/main" id="{3CF844DB-6F44-41CC-AC5B-05FF729AB71A}"/>
               </a:ext>
             </a:extLst>
           </p:cNvPr>
@@ -12521,7 +12529,7 @@
           <p:cNvPr id="16" name="">
             <a:extLst xmlns:a="http://schemas.openxmlformats.org/drawingml/2006/main">
               <a:ext uri="{FF2B5EF4-FFF2-40B4-BE49-F238E27FC236}">
-                <a16:creationId xmlns:a16="http://schemas.microsoft.com/office/drawing/2014/main" id="{A3246C66-756A-4493-A696-4A6107340FD6}"/>
+                <a16:creationId xmlns:a16="http://schemas.microsoft.com/office/drawing/2014/main" id="{2A555A5C-ED00-4926-8E8E-723B24000C7D}"/>
               </a:ext>
             </a:extLst>
           </p:cNvPr>
@@ -12578,7 +12586,7 @@
           <p:cNvPr id="17" name="">
             <a:extLst xmlns:a="http://schemas.openxmlformats.org/drawingml/2006/main">
               <a:ext uri="{FF2B5EF4-FFF2-40B4-BE49-F238E27FC236}">
-                <a16:creationId xmlns:a16="http://schemas.microsoft.com/office/drawing/2014/main" id="{51675D80-FC89-4421-9845-56D6A2688EAC}"/>
+                <a16:creationId xmlns:a16="http://schemas.microsoft.com/office/drawing/2014/main" id="{2A748BCC-41FC-4E7D-8F13-B32AAAE4B0D6}"/>
               </a:ext>
             </a:extLst>
           </p:cNvPr>
@@ -12635,7 +12643,7 @@
           <p:cNvPr id="18" name="">
             <a:extLst xmlns:a="http://schemas.openxmlformats.org/drawingml/2006/main">
               <a:ext uri="{FF2B5EF4-FFF2-40B4-BE49-F238E27FC236}">
-                <a16:creationId xmlns:a16="http://schemas.microsoft.com/office/drawing/2014/main" id="{610BDAC8-E061-468D-B282-3152F2AAAB60}"/>
+                <a16:creationId xmlns:a16="http://schemas.microsoft.com/office/drawing/2014/main" id="{9E852344-5028-44E6-9E87-22165B3FFAE6}"/>
               </a:ext>
             </a:extLst>
           </p:cNvPr>
@@ -12669,7 +12677,7 @@
           <p:cNvPr id="19" name="">
             <a:extLst xmlns:a="http://schemas.openxmlformats.org/drawingml/2006/main">
               <a:ext uri="{FF2B5EF4-FFF2-40B4-BE49-F238E27FC236}">
-                <a16:creationId xmlns:a16="http://schemas.microsoft.com/office/drawing/2014/main" id="{670E6DC7-1A55-434A-BCF6-E1B59F6D98B8}"/>
+                <a16:creationId xmlns:a16="http://schemas.microsoft.com/office/drawing/2014/main" id="{970D183E-3B3A-4B51-9506-C8A7E866EEAA}"/>
               </a:ext>
             </a:extLst>
           </p:cNvPr>
@@ -12701,7 +12709,7 @@
           <p:cNvPr id="20" name="">
             <a:extLst xmlns:a="http://schemas.openxmlformats.org/drawingml/2006/main">
               <a:ext uri="{FF2B5EF4-FFF2-40B4-BE49-F238E27FC236}">
-                <a16:creationId xmlns:a16="http://schemas.microsoft.com/office/drawing/2014/main" id="{BCCCABB7-D8FE-44BF-A8FC-986683F4F948}"/>
+                <a16:creationId xmlns:a16="http://schemas.microsoft.com/office/drawing/2014/main" id="{5D78367F-1CB4-4D8A-92EB-E40E789A640C}"/>
               </a:ext>
             </a:extLst>
           </p:cNvPr>
@@ -12758,7 +12766,7 @@
           <p:cNvPr id="21" name="">
             <a:extLst xmlns:a="http://schemas.openxmlformats.org/drawingml/2006/main">
               <a:ext uri="{FF2B5EF4-FFF2-40B4-BE49-F238E27FC236}">
-                <a16:creationId xmlns:a16="http://schemas.microsoft.com/office/drawing/2014/main" id="{7B3AAF1A-14DA-4207-8A67-7002B21041CB}"/>
+                <a16:creationId xmlns:a16="http://schemas.microsoft.com/office/drawing/2014/main" id="{C0DCDEC6-CF91-4BAD-AE57-2473A43D6769}"/>
               </a:ext>
             </a:extLst>
           </p:cNvPr>
@@ -12815,7 +12823,7 @@
           <p:cNvPr id="22" name="">
             <a:extLst xmlns:a="http://schemas.openxmlformats.org/drawingml/2006/main">
               <a:ext uri="{FF2B5EF4-FFF2-40B4-BE49-F238E27FC236}">
-                <a16:creationId xmlns:a16="http://schemas.microsoft.com/office/drawing/2014/main" id="{A9260357-9882-4C78-8469-5983632B6AC8}"/>
+                <a16:creationId xmlns:a16="http://schemas.microsoft.com/office/drawing/2014/main" id="{4A4C49CF-8359-48BE-BA3E-DEFF917BC8CA}"/>
               </a:ext>
             </a:extLst>
           </p:cNvPr>
@@ -12870,7 +12878,7 @@
     </p:spTree>
     <p:extLst>
       <p:ext uri="{BB962C8B-B14F-4D97-AF65-F5344CB8AC3E}">
-        <p14:creationId xmlns:p14="http://schemas.microsoft.com/office/powerpoint/2010/main" val="356345213"/>
+        <p14:creationId xmlns:p14="http://schemas.microsoft.com/office/powerpoint/2010/main" val="1420679830"/>
       </p:ext>
     </p:extLst>
   </p:cSld>
@@ -13071,7 +13079,7 @@
           <p:cNvPr id="22" name="">
             <a:extLst xmlns:a="http://schemas.openxmlformats.org/drawingml/2006/main">
               <a:ext uri="{FF2B5EF4-FFF2-40B4-BE49-F238E27FC236}">
-                <a16:creationId xmlns:a16="http://schemas.microsoft.com/office/drawing/2014/main" id="{7F9909DE-5D18-4075-9C3F-28DDC41AD162}"/>
+                <a16:creationId xmlns:a16="http://schemas.microsoft.com/office/drawing/2014/main" id="{9E595165-5C31-4EBD-A191-9FE66B1AB625}"/>
               </a:ext>
             </a:extLst>
           </p:cNvPr>
@@ -13103,7 +13111,7 @@
           <p:cNvPr id="2" name="">
             <a:extLst xmlns:a="http://schemas.openxmlformats.org/drawingml/2006/main">
               <a:ext uri="{FF2B5EF4-FFF2-40B4-BE49-F238E27FC236}">
-                <a16:creationId xmlns:a16="http://schemas.microsoft.com/office/drawing/2014/main" id="{37260B9A-A239-44B1-9AA9-92BA2E49F8F1}"/>
+                <a16:creationId xmlns:a16="http://schemas.microsoft.com/office/drawing/2014/main" id="{82B7E26A-2AAB-4B4E-92DD-AA4B3D2DDF4D}"/>
               </a:ext>
             </a:extLst>
           </p:cNvPr>
@@ -13160,7 +13168,7 @@
           <p:cNvPr id="3" name="">
             <a:extLst xmlns:a="http://schemas.openxmlformats.org/drawingml/2006/main">
               <a:ext uri="{FF2B5EF4-FFF2-40B4-BE49-F238E27FC236}">
-                <a16:creationId xmlns:a16="http://schemas.microsoft.com/office/drawing/2014/main" id="{9B8F4453-5C5F-46F6-B7CB-8D87DC6969E4}"/>
+                <a16:creationId xmlns:a16="http://schemas.microsoft.com/office/drawing/2014/main" id="{0083EEA6-F941-4DA0-9CCB-35335D6F29DF}"/>
               </a:ext>
             </a:extLst>
           </p:cNvPr>
@@ -13192,7 +13200,7 @@
           <p:cNvPr id="4" name="">
             <a:extLst xmlns:a="http://schemas.openxmlformats.org/drawingml/2006/main">
               <a:ext uri="{FF2B5EF4-FFF2-40B4-BE49-F238E27FC236}">
-                <a16:creationId xmlns:a16="http://schemas.microsoft.com/office/drawing/2014/main" id="{876A33AF-B1A5-482F-9066-67B77AA7716D}"/>
+                <a16:creationId xmlns:a16="http://schemas.microsoft.com/office/drawing/2014/main" id="{D8B6A612-A04A-4F62-9D82-BD0FEC30D173}"/>
               </a:ext>
             </a:extLst>
           </p:cNvPr>
@@ -13249,7 +13257,7 @@
           <p:cNvPr id="5" name="">
             <a:extLst xmlns:a="http://schemas.openxmlformats.org/drawingml/2006/main">
               <a:ext uri="{FF2B5EF4-FFF2-40B4-BE49-F238E27FC236}">
-                <a16:creationId xmlns:a16="http://schemas.microsoft.com/office/drawing/2014/main" id="{9D9BCEA0-1073-4214-A9F2-9944E5B7A9E4}"/>
+                <a16:creationId xmlns:a16="http://schemas.microsoft.com/office/drawing/2014/main" id="{D05CFCB5-7192-4501-96BB-C805F4FBE63B}"/>
               </a:ext>
             </a:extLst>
           </p:cNvPr>
@@ -13306,7 +13314,7 @@
           <p:cNvPr id="6" name="">
             <a:extLst xmlns:a="http://schemas.openxmlformats.org/drawingml/2006/main">
               <a:ext uri="{FF2B5EF4-FFF2-40B4-BE49-F238E27FC236}">
-                <a16:creationId xmlns:a16="http://schemas.microsoft.com/office/drawing/2014/main" id="{086F77B2-49C4-497F-ACC8-BADB33D1C5A5}"/>
+                <a16:creationId xmlns:a16="http://schemas.microsoft.com/office/drawing/2014/main" id="{967650CF-E59A-49CE-A90D-DFD542C907D6}"/>
               </a:ext>
             </a:extLst>
           </p:cNvPr>
@@ -13363,7 +13371,7 @@
           <p:cNvPr id="7" name="">
             <a:extLst xmlns:a="http://schemas.openxmlformats.org/drawingml/2006/main">
               <a:ext uri="{FF2B5EF4-FFF2-40B4-BE49-F238E27FC236}">
-                <a16:creationId xmlns:a16="http://schemas.microsoft.com/office/drawing/2014/main" id="{EC2DE50B-B869-426D-9B94-7678F0053098}"/>
+                <a16:creationId xmlns:a16="http://schemas.microsoft.com/office/drawing/2014/main" id="{4FA93859-AF1C-45AC-8340-F2643B28E5E0}"/>
               </a:ext>
             </a:extLst>
           </p:cNvPr>
@@ -13395,7 +13403,7 @@
           <p:cNvPr id="8" name="">
             <a:extLst xmlns:a="http://schemas.openxmlformats.org/drawingml/2006/main">
               <a:ext uri="{FF2B5EF4-FFF2-40B4-BE49-F238E27FC236}">
-                <a16:creationId xmlns:a16="http://schemas.microsoft.com/office/drawing/2014/main" id="{F3982753-FEB3-4099-B53A-D11A6C037287}"/>
+                <a16:creationId xmlns:a16="http://schemas.microsoft.com/office/drawing/2014/main" id="{85E47EAB-8D0F-4FD8-A668-1A2F592C03E2}"/>
               </a:ext>
             </a:extLst>
           </p:cNvPr>
@@ -13452,7 +13460,7 @@
           <p:cNvPr id="9" name="">
             <a:extLst xmlns:a="http://schemas.openxmlformats.org/drawingml/2006/main">
               <a:ext uri="{FF2B5EF4-FFF2-40B4-BE49-F238E27FC236}">
-                <a16:creationId xmlns:a16="http://schemas.microsoft.com/office/drawing/2014/main" id="{0631ADE5-BEAB-4258-9E6C-85093C784E5B}"/>
+                <a16:creationId xmlns:a16="http://schemas.microsoft.com/office/drawing/2014/main" id="{6DCF8943-63F8-4E65-AA49-F508E9FEFA5F}"/>
               </a:ext>
             </a:extLst>
           </p:cNvPr>
@@ -13509,7 +13517,7 @@
           <p:cNvPr id="10" name="">
             <a:extLst xmlns:a="http://schemas.openxmlformats.org/drawingml/2006/main">
               <a:ext uri="{FF2B5EF4-FFF2-40B4-BE49-F238E27FC236}">
-                <a16:creationId xmlns:a16="http://schemas.microsoft.com/office/drawing/2014/main" id="{49BC7644-A921-46BF-9921-675C8D823DD9}"/>
+                <a16:creationId xmlns:a16="http://schemas.microsoft.com/office/drawing/2014/main" id="{235A33A8-6349-4238-A91F-0021F42981F5}"/>
               </a:ext>
             </a:extLst>
           </p:cNvPr>
@@ -13543,7 +13551,7 @@
           <p:cNvPr id="11" name="">
             <a:extLst xmlns:a="http://schemas.openxmlformats.org/drawingml/2006/main">
               <a:ext uri="{FF2B5EF4-FFF2-40B4-BE49-F238E27FC236}">
-                <a16:creationId xmlns:a16="http://schemas.microsoft.com/office/drawing/2014/main" id="{06EF5EBC-4E2E-4543-ADB2-41FC0D7D6D4F}"/>
+                <a16:creationId xmlns:a16="http://schemas.microsoft.com/office/drawing/2014/main" id="{6EEF542E-5967-4AF0-AF7D-16A5F81DD275}"/>
               </a:ext>
             </a:extLst>
           </p:cNvPr>
@@ -13575,7 +13583,7 @@
           <p:cNvPr id="12" name="">
             <a:extLst xmlns:a="http://schemas.openxmlformats.org/drawingml/2006/main">
               <a:ext uri="{FF2B5EF4-FFF2-40B4-BE49-F238E27FC236}">
-                <a16:creationId xmlns:a16="http://schemas.microsoft.com/office/drawing/2014/main" id="{589F1913-B7A5-479D-82D2-568C9D58A178}"/>
+                <a16:creationId xmlns:a16="http://schemas.microsoft.com/office/drawing/2014/main" id="{8791DCA4-163D-43D2-81E4-36A980A63EFC}"/>
               </a:ext>
             </a:extLst>
           </p:cNvPr>
@@ -13632,7 +13640,7 @@
           <p:cNvPr id="13" name="">
             <a:extLst xmlns:a="http://schemas.openxmlformats.org/drawingml/2006/main">
               <a:ext uri="{FF2B5EF4-FFF2-40B4-BE49-F238E27FC236}">
-                <a16:creationId xmlns:a16="http://schemas.microsoft.com/office/drawing/2014/main" id="{297CD73F-A095-498B-AD1E-42FFF64DD175}"/>
+                <a16:creationId xmlns:a16="http://schemas.microsoft.com/office/drawing/2014/main" id="{821006C8-F649-4A91-A0AD-478E051B63FE}"/>
               </a:ext>
             </a:extLst>
           </p:cNvPr>
@@ -13689,7 +13697,7 @@
           <p:cNvPr id="14" name="">
             <a:extLst xmlns:a="http://schemas.openxmlformats.org/drawingml/2006/main">
               <a:ext uri="{FF2B5EF4-FFF2-40B4-BE49-F238E27FC236}">
-                <a16:creationId xmlns:a16="http://schemas.microsoft.com/office/drawing/2014/main" id="{60E8D300-1035-4692-99C7-8CF29EEA7A6F}"/>
+                <a16:creationId xmlns:a16="http://schemas.microsoft.com/office/drawing/2014/main" id="{FC197FFC-B0F0-4B7C-AFCF-8244054D3CE6}"/>
               </a:ext>
             </a:extLst>
           </p:cNvPr>
@@ -13723,7 +13731,7 @@
           <p:cNvPr id="15" name="">
             <a:extLst xmlns:a="http://schemas.openxmlformats.org/drawingml/2006/main">
               <a:ext uri="{FF2B5EF4-FFF2-40B4-BE49-F238E27FC236}">
-                <a16:creationId xmlns:a16="http://schemas.microsoft.com/office/drawing/2014/main" id="{D35DBF27-7407-44EF-86E6-DB7EB3011F84}"/>
+                <a16:creationId xmlns:a16="http://schemas.microsoft.com/office/drawing/2014/main" id="{6C4B5591-4E86-45CC-9CA1-3AFEB9D22F87}"/>
               </a:ext>
             </a:extLst>
           </p:cNvPr>
@@ -13755,7 +13763,7 @@
           <p:cNvPr id="16" name="">
             <a:extLst xmlns:a="http://schemas.openxmlformats.org/drawingml/2006/main">
               <a:ext uri="{FF2B5EF4-FFF2-40B4-BE49-F238E27FC236}">
-                <a16:creationId xmlns:a16="http://schemas.microsoft.com/office/drawing/2014/main" id="{020AF3E0-0848-4496-86D7-70A2DE9163C4}"/>
+                <a16:creationId xmlns:a16="http://schemas.microsoft.com/office/drawing/2014/main" id="{33F32BD0-F3F4-44AF-84BC-9FD8074392DC}"/>
               </a:ext>
             </a:extLst>
           </p:cNvPr>
@@ -13812,7 +13820,7 @@
           <p:cNvPr id="17" name="">
             <a:extLst xmlns:a="http://schemas.openxmlformats.org/drawingml/2006/main">
               <a:ext uri="{FF2B5EF4-FFF2-40B4-BE49-F238E27FC236}">
-                <a16:creationId xmlns:a16="http://schemas.microsoft.com/office/drawing/2014/main" id="{F2D1DF5C-A69F-4CB2-915F-02CB16E4E45B}"/>
+                <a16:creationId xmlns:a16="http://schemas.microsoft.com/office/drawing/2014/main" id="{E2512413-2EAD-451B-BFAF-542F42BF518C}"/>
               </a:ext>
             </a:extLst>
           </p:cNvPr>
@@ -13869,7 +13877,7 @@
           <p:cNvPr id="18" name="">
             <a:extLst xmlns:a="http://schemas.openxmlformats.org/drawingml/2006/main">
               <a:ext uri="{FF2B5EF4-FFF2-40B4-BE49-F238E27FC236}">
-                <a16:creationId xmlns:a16="http://schemas.microsoft.com/office/drawing/2014/main" id="{943B4732-646E-4B79-A30B-86795A340A0E}"/>
+                <a16:creationId xmlns:a16="http://schemas.microsoft.com/office/drawing/2014/main" id="{E640DD74-435F-47D4-897F-A6D2D7B95A9F}"/>
               </a:ext>
             </a:extLst>
           </p:cNvPr>
@@ -13903,7 +13911,7 @@
           <p:cNvPr id="19" name="">
             <a:extLst xmlns:a="http://schemas.openxmlformats.org/drawingml/2006/main">
               <a:ext uri="{FF2B5EF4-FFF2-40B4-BE49-F238E27FC236}">
-                <a16:creationId xmlns:a16="http://schemas.microsoft.com/office/drawing/2014/main" id="{998E5509-2492-4C1D-B334-FBF73842636E}"/>
+                <a16:creationId xmlns:a16="http://schemas.microsoft.com/office/drawing/2014/main" id="{189F2DB7-023F-428E-A033-4EA720AAC8AA}"/>
               </a:ext>
             </a:extLst>
           </p:cNvPr>
@@ -13935,7 +13943,7 @@
           <p:cNvPr id="20" name="">
             <a:extLst xmlns:a="http://schemas.openxmlformats.org/drawingml/2006/main">
               <a:ext uri="{FF2B5EF4-FFF2-40B4-BE49-F238E27FC236}">
-                <a16:creationId xmlns:a16="http://schemas.microsoft.com/office/drawing/2014/main" id="{22A8C412-D559-4B1F-B58B-EDD087E26364}"/>
+                <a16:creationId xmlns:a16="http://schemas.microsoft.com/office/drawing/2014/main" id="{81FCFE3B-0AE8-415C-8302-54D835E7FE48}"/>
               </a:ext>
             </a:extLst>
           </p:cNvPr>
@@ -13992,7 +14000,7 @@
           <p:cNvPr id="21" name="">
             <a:extLst xmlns:a="http://schemas.openxmlformats.org/drawingml/2006/main">
               <a:ext uri="{FF2B5EF4-FFF2-40B4-BE49-F238E27FC236}">
-                <a16:creationId xmlns:a16="http://schemas.microsoft.com/office/drawing/2014/main" id="{281424A1-925E-4DBF-B836-B9B695C8F3EB}"/>
+                <a16:creationId xmlns:a16="http://schemas.microsoft.com/office/drawing/2014/main" id="{052C6519-638E-4F1A-BFD7-07B8DBB35324}"/>
               </a:ext>
             </a:extLst>
           </p:cNvPr>
@@ -14047,7 +14055,7 @@
     </p:spTree>
     <p:extLst>
       <p:ext uri="{BB962C8B-B14F-4D97-AF65-F5344CB8AC3E}">
-        <p14:creationId xmlns:p14="http://schemas.microsoft.com/office/powerpoint/2010/main" val="905982897"/>
+        <p14:creationId xmlns:p14="http://schemas.microsoft.com/office/powerpoint/2010/main" val="1100753530"/>
       </p:ext>
     </p:extLst>
   </p:cSld>
